--- a/assets/TCS349/Unit-2/Lecture1_Responsible_AI_Principles.pptx
+++ b/assets/TCS349/Unit-2/Lecture1_Responsible_AI_Principles.pptx
@@ -5,27 +5,23 @@
     <p:sldMasterId id="2147483648" r:id="rId1"/>
   </p:sldMasterIdLst>
   <p:notesMasterIdLst>
-    <p:notesMasterId r:id="rId20"/>
+    <p:notesMasterId r:id="rId16"/>
   </p:notesMasterIdLst>
   <p:sldIdLst>
     <p:sldId id="256" r:id="rId2"/>
-    <p:sldId id="257" r:id="rId3"/>
-    <p:sldId id="258" r:id="rId4"/>
-    <p:sldId id="259" r:id="rId5"/>
-    <p:sldId id="260" r:id="rId6"/>
-    <p:sldId id="261" r:id="rId7"/>
-    <p:sldId id="262" r:id="rId8"/>
-    <p:sldId id="263" r:id="rId9"/>
-    <p:sldId id="264" r:id="rId10"/>
-    <p:sldId id="265" r:id="rId11"/>
-    <p:sldId id="266" r:id="rId12"/>
-    <p:sldId id="267" r:id="rId13"/>
-    <p:sldId id="268" r:id="rId14"/>
-    <p:sldId id="269" r:id="rId15"/>
-    <p:sldId id="270" r:id="rId16"/>
-    <p:sldId id="271" r:id="rId17"/>
-    <p:sldId id="272" r:id="rId18"/>
-    <p:sldId id="273" r:id="rId19"/>
+    <p:sldId id="259" r:id="rId3"/>
+    <p:sldId id="260" r:id="rId4"/>
+    <p:sldId id="261" r:id="rId5"/>
+    <p:sldId id="262" r:id="rId6"/>
+    <p:sldId id="263" r:id="rId7"/>
+    <p:sldId id="264" r:id="rId8"/>
+    <p:sldId id="265" r:id="rId9"/>
+    <p:sldId id="266" r:id="rId10"/>
+    <p:sldId id="267" r:id="rId11"/>
+    <p:sldId id="268" r:id="rId12"/>
+    <p:sldId id="269" r:id="rId13"/>
+    <p:sldId id="270" r:id="rId14"/>
+    <p:sldId id="271" r:id="rId15"/>
   </p:sldIdLst>
   <p:sldSz cx="12192000" cy="6858000"/>
   <p:notesSz cx="6858000" cy="12192000"/>
@@ -769,342 +765,6 @@
             <a:fld id="{F7021451-1387-4CA6-816F-3879F97B5CBC}" type="slidenum">
               <a:rPr lang="en-US"/>
               <a:t>14</a:t>
-            </a:fld>
-            <a:endParaRPr lang="en-US"/>
-          </a:p>
-        </p:txBody>
-      </p:sp>
-    </p:spTree>
-    <p:extLst>
-      <p:ext uri="{BB962C8B-B14F-4D97-AF65-F5344CB8AC3E}">
-        <p14:creationId xmlns:p14="http://schemas.microsoft.com/office/powerpoint/2010/main" val="1024086991"/>
-      </p:ext>
-    </p:extLst>
-  </p:cSld>
-  <p:clrMapOvr>
-    <a:masterClrMapping/>
-  </p:clrMapOvr>
-</p:notes>
-</file>
-
-<file path=ppt/notesSlides/notesSlide15.xml><?xml version="1.0" encoding="utf-8"?>
-<p:notes xmlns:a="http://schemas.openxmlformats.org/drawingml/2006/main" xmlns:r="http://schemas.openxmlformats.org/officeDocument/2006/relationships" xmlns:p="http://schemas.openxmlformats.org/presentationml/2006/main">
-  <p:cSld>
-    <p:spTree>
-      <p:nvGrpSpPr>
-        <p:cNvPr id="1" name=""/>
-        <p:cNvGrpSpPr/>
-        <p:nvPr/>
-      </p:nvGrpSpPr>
-      <p:grpSpPr>
-        <a:xfrm>
-          <a:off x="0" y="0"/>
-          <a:ext cx="0" cy="0"/>
-          <a:chOff x="0" y="0"/>
-          <a:chExt cx="0" cy="0"/>
-        </a:xfrm>
-      </p:grpSpPr>
-      <p:sp>
-        <p:nvSpPr>
-          <p:cNvPr id="2" name="Slide Image Placeholder 1"/>
-          <p:cNvSpPr>
-            <a:spLocks noGrp="1" noRot="1" noChangeAspect="1"/>
-          </p:cNvSpPr>
-          <p:nvPr>
-            <p:ph type="sldImg"/>
-          </p:nvPr>
-        </p:nvSpPr>
-        <p:spPr/>
-      </p:sp>
-      <p:sp>
-        <p:nvSpPr>
-          <p:cNvPr id="3" name="Notes Placeholder 2"/>
-          <p:cNvSpPr>
-            <a:spLocks noGrp="1"/>
-          </p:cNvSpPr>
-          <p:nvPr>
-            <p:ph type="body" idx="1"/>
-          </p:nvPr>
-        </p:nvSpPr>
-        <p:spPr/>
-        <p:txBody>
-          <a:bodyPr/>
-          <a:lstStyle/>
-          <a:p>
-            <a:endParaRPr lang="en-US" dirty="0"/>
-          </a:p>
-        </p:txBody>
-      </p:sp>
-      <p:sp>
-        <p:nvSpPr>
-          <p:cNvPr id="4" name="Slide Number Placeholder 3"/>
-          <p:cNvSpPr>
-            <a:spLocks noGrp="1"/>
-          </p:cNvSpPr>
-          <p:nvPr>
-            <p:ph type="sldNum" sz="quarter" idx="10"/>
-          </p:nvPr>
-        </p:nvSpPr>
-        <p:spPr/>
-        <p:txBody>
-          <a:bodyPr/>
-          <a:lstStyle/>
-          <a:p>
-            <a:fld id="{F7021451-1387-4CA6-816F-3879F97B5CBC}" type="slidenum">
-              <a:rPr lang="en-US"/>
-              <a:t>15</a:t>
-            </a:fld>
-            <a:endParaRPr lang="en-US"/>
-          </a:p>
-        </p:txBody>
-      </p:sp>
-    </p:spTree>
-    <p:extLst>
-      <p:ext uri="{BB962C8B-B14F-4D97-AF65-F5344CB8AC3E}">
-        <p14:creationId xmlns:p14="http://schemas.microsoft.com/office/powerpoint/2010/main" val="1024086991"/>
-      </p:ext>
-    </p:extLst>
-  </p:cSld>
-  <p:clrMapOvr>
-    <a:masterClrMapping/>
-  </p:clrMapOvr>
-</p:notes>
-</file>
-
-<file path=ppt/notesSlides/notesSlide16.xml><?xml version="1.0" encoding="utf-8"?>
-<p:notes xmlns:a="http://schemas.openxmlformats.org/drawingml/2006/main" xmlns:r="http://schemas.openxmlformats.org/officeDocument/2006/relationships" xmlns:p="http://schemas.openxmlformats.org/presentationml/2006/main">
-  <p:cSld>
-    <p:spTree>
-      <p:nvGrpSpPr>
-        <p:cNvPr id="1" name=""/>
-        <p:cNvGrpSpPr/>
-        <p:nvPr/>
-      </p:nvGrpSpPr>
-      <p:grpSpPr>
-        <a:xfrm>
-          <a:off x="0" y="0"/>
-          <a:ext cx="0" cy="0"/>
-          <a:chOff x="0" y="0"/>
-          <a:chExt cx="0" cy="0"/>
-        </a:xfrm>
-      </p:grpSpPr>
-      <p:sp>
-        <p:nvSpPr>
-          <p:cNvPr id="2" name="Slide Image Placeholder 1"/>
-          <p:cNvSpPr>
-            <a:spLocks noGrp="1" noRot="1" noChangeAspect="1"/>
-          </p:cNvSpPr>
-          <p:nvPr>
-            <p:ph type="sldImg"/>
-          </p:nvPr>
-        </p:nvSpPr>
-        <p:spPr/>
-      </p:sp>
-      <p:sp>
-        <p:nvSpPr>
-          <p:cNvPr id="3" name="Notes Placeholder 2"/>
-          <p:cNvSpPr>
-            <a:spLocks noGrp="1"/>
-          </p:cNvSpPr>
-          <p:nvPr>
-            <p:ph type="body" idx="1"/>
-          </p:nvPr>
-        </p:nvSpPr>
-        <p:spPr/>
-        <p:txBody>
-          <a:bodyPr/>
-          <a:lstStyle/>
-          <a:p>
-            <a:endParaRPr lang="en-US" dirty="0"/>
-          </a:p>
-        </p:txBody>
-      </p:sp>
-      <p:sp>
-        <p:nvSpPr>
-          <p:cNvPr id="4" name="Slide Number Placeholder 3"/>
-          <p:cNvSpPr>
-            <a:spLocks noGrp="1"/>
-          </p:cNvSpPr>
-          <p:nvPr>
-            <p:ph type="sldNum" sz="quarter" idx="10"/>
-          </p:nvPr>
-        </p:nvSpPr>
-        <p:spPr/>
-        <p:txBody>
-          <a:bodyPr/>
-          <a:lstStyle/>
-          <a:p>
-            <a:fld id="{F7021451-1387-4CA6-816F-3879F97B5CBC}" type="slidenum">
-              <a:rPr lang="en-US"/>
-              <a:t>16</a:t>
-            </a:fld>
-            <a:endParaRPr lang="en-US"/>
-          </a:p>
-        </p:txBody>
-      </p:sp>
-    </p:spTree>
-    <p:extLst>
-      <p:ext uri="{BB962C8B-B14F-4D97-AF65-F5344CB8AC3E}">
-        <p14:creationId xmlns:p14="http://schemas.microsoft.com/office/powerpoint/2010/main" val="1024086991"/>
-      </p:ext>
-    </p:extLst>
-  </p:cSld>
-  <p:clrMapOvr>
-    <a:masterClrMapping/>
-  </p:clrMapOvr>
-</p:notes>
-</file>
-
-<file path=ppt/notesSlides/notesSlide17.xml><?xml version="1.0" encoding="utf-8"?>
-<p:notes xmlns:a="http://schemas.openxmlformats.org/drawingml/2006/main" xmlns:r="http://schemas.openxmlformats.org/officeDocument/2006/relationships" xmlns:p="http://schemas.openxmlformats.org/presentationml/2006/main">
-  <p:cSld>
-    <p:spTree>
-      <p:nvGrpSpPr>
-        <p:cNvPr id="1" name=""/>
-        <p:cNvGrpSpPr/>
-        <p:nvPr/>
-      </p:nvGrpSpPr>
-      <p:grpSpPr>
-        <a:xfrm>
-          <a:off x="0" y="0"/>
-          <a:ext cx="0" cy="0"/>
-          <a:chOff x="0" y="0"/>
-          <a:chExt cx="0" cy="0"/>
-        </a:xfrm>
-      </p:grpSpPr>
-      <p:sp>
-        <p:nvSpPr>
-          <p:cNvPr id="2" name="Slide Image Placeholder 1"/>
-          <p:cNvSpPr>
-            <a:spLocks noGrp="1" noRot="1" noChangeAspect="1"/>
-          </p:cNvSpPr>
-          <p:nvPr>
-            <p:ph type="sldImg"/>
-          </p:nvPr>
-        </p:nvSpPr>
-        <p:spPr/>
-      </p:sp>
-      <p:sp>
-        <p:nvSpPr>
-          <p:cNvPr id="3" name="Notes Placeholder 2"/>
-          <p:cNvSpPr>
-            <a:spLocks noGrp="1"/>
-          </p:cNvSpPr>
-          <p:nvPr>
-            <p:ph type="body" idx="1"/>
-          </p:nvPr>
-        </p:nvSpPr>
-        <p:spPr/>
-        <p:txBody>
-          <a:bodyPr/>
-          <a:lstStyle/>
-          <a:p>
-            <a:endParaRPr lang="en-US" dirty="0"/>
-          </a:p>
-        </p:txBody>
-      </p:sp>
-      <p:sp>
-        <p:nvSpPr>
-          <p:cNvPr id="4" name="Slide Number Placeholder 3"/>
-          <p:cNvSpPr>
-            <a:spLocks noGrp="1"/>
-          </p:cNvSpPr>
-          <p:nvPr>
-            <p:ph type="sldNum" sz="quarter" idx="10"/>
-          </p:nvPr>
-        </p:nvSpPr>
-        <p:spPr/>
-        <p:txBody>
-          <a:bodyPr/>
-          <a:lstStyle/>
-          <a:p>
-            <a:fld id="{F7021451-1387-4CA6-816F-3879F97B5CBC}" type="slidenum">
-              <a:rPr lang="en-US"/>
-              <a:t>17</a:t>
-            </a:fld>
-            <a:endParaRPr lang="en-US"/>
-          </a:p>
-        </p:txBody>
-      </p:sp>
-    </p:spTree>
-    <p:extLst>
-      <p:ext uri="{BB962C8B-B14F-4D97-AF65-F5344CB8AC3E}">
-        <p14:creationId xmlns:p14="http://schemas.microsoft.com/office/powerpoint/2010/main" val="1024086991"/>
-      </p:ext>
-    </p:extLst>
-  </p:cSld>
-  <p:clrMapOvr>
-    <a:masterClrMapping/>
-  </p:clrMapOvr>
-</p:notes>
-</file>
-
-<file path=ppt/notesSlides/notesSlide18.xml><?xml version="1.0" encoding="utf-8"?>
-<p:notes xmlns:a="http://schemas.openxmlformats.org/drawingml/2006/main" xmlns:r="http://schemas.openxmlformats.org/officeDocument/2006/relationships" xmlns:p="http://schemas.openxmlformats.org/presentationml/2006/main">
-  <p:cSld>
-    <p:spTree>
-      <p:nvGrpSpPr>
-        <p:cNvPr id="1" name=""/>
-        <p:cNvGrpSpPr/>
-        <p:nvPr/>
-      </p:nvGrpSpPr>
-      <p:grpSpPr>
-        <a:xfrm>
-          <a:off x="0" y="0"/>
-          <a:ext cx="0" cy="0"/>
-          <a:chOff x="0" y="0"/>
-          <a:chExt cx="0" cy="0"/>
-        </a:xfrm>
-      </p:grpSpPr>
-      <p:sp>
-        <p:nvSpPr>
-          <p:cNvPr id="2" name="Slide Image Placeholder 1"/>
-          <p:cNvSpPr>
-            <a:spLocks noGrp="1" noRot="1" noChangeAspect="1"/>
-          </p:cNvSpPr>
-          <p:nvPr>
-            <p:ph type="sldImg"/>
-          </p:nvPr>
-        </p:nvSpPr>
-        <p:spPr/>
-      </p:sp>
-      <p:sp>
-        <p:nvSpPr>
-          <p:cNvPr id="3" name="Notes Placeholder 2"/>
-          <p:cNvSpPr>
-            <a:spLocks noGrp="1"/>
-          </p:cNvSpPr>
-          <p:nvPr>
-            <p:ph type="body" idx="1"/>
-          </p:nvPr>
-        </p:nvSpPr>
-        <p:spPr/>
-        <p:txBody>
-          <a:bodyPr/>
-          <a:lstStyle/>
-          <a:p>
-            <a:endParaRPr lang="en-US" dirty="0"/>
-          </a:p>
-        </p:txBody>
-      </p:sp>
-      <p:sp>
-        <p:nvSpPr>
-          <p:cNvPr id="4" name="Slide Number Placeholder 3"/>
-          <p:cNvSpPr>
-            <a:spLocks noGrp="1"/>
-          </p:cNvSpPr>
-          <p:nvPr>
-            <p:ph type="sldNum" sz="quarter" idx="10"/>
-          </p:nvPr>
-        </p:nvSpPr>
-        <p:spPr/>
-        <p:txBody>
-          <a:bodyPr/>
-          <a:lstStyle/>
-          <a:p>
-            <a:fld id="{F7021451-1387-4CA6-816F-3879F97B5CBC}" type="slidenum">
-              <a:rPr lang="en-US"/>
-              <a:t>18</a:t>
             </a:fld>
             <a:endParaRPr lang="en-US"/>
           </a:p>
@@ -2918,806 +2578,6 @@
 
 <file path=ppt/slides/slide10.xml><?xml version="1.0" encoding="utf-8"?>
 <p:sld xmlns:a="http://schemas.openxmlformats.org/drawingml/2006/main" xmlns:r="http://schemas.openxmlformats.org/officeDocument/2006/relationships" xmlns:p="http://schemas.openxmlformats.org/presentationml/2006/main">
-  <p:cSld name="Slide 10">
-    <p:bg>
-      <p:bgPr>
-        <a:solidFill>
-          <a:srgbClr val="FFFFFF"/>
-        </a:solidFill>
-        <a:effectLst/>
-      </p:bgPr>
-    </p:bg>
-    <p:spTree>
-      <p:nvGrpSpPr>
-        <p:cNvPr id="1" name=""/>
-        <p:cNvGrpSpPr/>
-        <p:nvPr/>
-      </p:nvGrpSpPr>
-      <p:grpSpPr>
-        <a:xfrm>
-          <a:off x="0" y="0"/>
-          <a:ext cx="0" cy="0"/>
-          <a:chOff x="0" y="0"/>
-          <a:chExt cx="0" cy="0"/>
-        </a:xfrm>
-      </p:grpSpPr>
-      <p:sp>
-        <p:nvSpPr>
-          <p:cNvPr id="2" name="Shape 0"/>
-          <p:cNvSpPr/>
-          <p:nvPr/>
-        </p:nvSpPr>
-        <p:spPr>
-          <a:xfrm>
-            <a:off x="0" y="0"/>
-            <a:ext cx="12191695" cy="502920"/>
-          </a:xfrm>
-          <a:prstGeom prst="rect">
-            <a:avLst/>
-          </a:prstGeom>
-          <a:solidFill>
-            <a:srgbClr val="F8FBFF"/>
-          </a:solidFill>
-          <a:ln w="12700">
-            <a:solidFill>
-              <a:srgbClr val="F8FBFF"/>
-            </a:solidFill>
-            <a:prstDash val="solid"/>
-          </a:ln>
-        </p:spPr>
-        <p:txBody>
-          <a:bodyPr/>
-          <a:lstStyle/>
-          <a:p>
-            <a:endParaRPr lang="en-IN"/>
-          </a:p>
-        </p:txBody>
-      </p:sp>
-      <p:sp>
-        <p:nvSpPr>
-          <p:cNvPr id="3" name="Shape 1"/>
-          <p:cNvSpPr/>
-          <p:nvPr/>
-        </p:nvSpPr>
-        <p:spPr>
-          <a:xfrm>
-            <a:off x="0" y="475488"/>
-            <a:ext cx="12191695" cy="27432"/>
-          </a:xfrm>
-          <a:prstGeom prst="rect">
-            <a:avLst/>
-          </a:prstGeom>
-          <a:solidFill>
-            <a:srgbClr val="2E75B6"/>
-          </a:solidFill>
-          <a:ln w="12700">
-            <a:solidFill>
-              <a:srgbClr val="2E75B6"/>
-            </a:solidFill>
-            <a:prstDash val="solid"/>
-          </a:ln>
-        </p:spPr>
-        <p:txBody>
-          <a:bodyPr/>
-          <a:lstStyle/>
-          <a:p>
-            <a:endParaRPr lang="en-IN"/>
-          </a:p>
-        </p:txBody>
-      </p:sp>
-      <p:sp>
-        <p:nvSpPr>
-          <p:cNvPr id="4" name="Text 2"/>
-          <p:cNvSpPr/>
-          <p:nvPr/>
-        </p:nvSpPr>
-        <p:spPr>
-          <a:xfrm>
-            <a:off x="365760" y="73152"/>
-            <a:ext cx="6400800" cy="274320"/>
-          </a:xfrm>
-          <a:prstGeom prst="rect">
-            <a:avLst/>
-          </a:prstGeom>
-          <a:noFill/>
-          <a:ln/>
-        </p:spPr>
-        <p:txBody>
-          <a:bodyPr wrap="square" lIns="0" tIns="0" rIns="0" bIns="0" rtlCol="0" anchor="ctr"/>
-          <a:lstStyle/>
-          <a:p>
-            <a:pPr marL="0" indent="0">
-              <a:buNone/>
-            </a:pPr>
-            <a:r>
-              <a:rPr lang="en-US" sz="1800" b="1" dirty="0">
-                <a:solidFill>
-                  <a:srgbClr val="1F4E79"/>
-                </a:solidFill>
-                <a:latin typeface="Times New Roman" pitchFamily="34" charset="0"/>
-                <a:ea typeface="Times New Roman" pitchFamily="34" charset="-122"/>
-                <a:cs typeface="Times New Roman" pitchFamily="34" charset="-120"/>
-              </a:rPr>
-              <a:t>TCS349: Responsible and Explainable AI</a:t>
-            </a:r>
-            <a:endParaRPr lang="en-US" sz="1800" dirty="0"/>
-          </a:p>
-        </p:txBody>
-      </p:sp>
-      <p:sp>
-        <p:nvSpPr>
-          <p:cNvPr id="5" name="Text 3"/>
-          <p:cNvSpPr/>
-          <p:nvPr/>
-        </p:nvSpPr>
-        <p:spPr>
-          <a:xfrm>
-            <a:off x="8321040" y="82296"/>
-            <a:ext cx="3383280" cy="274320"/>
-          </a:xfrm>
-          <a:prstGeom prst="rect">
-            <a:avLst/>
-          </a:prstGeom>
-          <a:noFill/>
-          <a:ln/>
-        </p:spPr>
-        <p:txBody>
-          <a:bodyPr wrap="square" lIns="0" tIns="0" rIns="0" bIns="0" rtlCol="0" anchor="ctr"/>
-          <a:lstStyle/>
-          <a:p>
-            <a:pPr marL="0" indent="0" algn="r">
-              <a:buNone/>
-            </a:pPr>
-            <a:r>
-              <a:rPr lang="en-US" sz="1600" b="1" dirty="0">
-                <a:solidFill>
-                  <a:srgbClr val="1F4E79"/>
-                </a:solidFill>
-                <a:latin typeface="Times New Roman" pitchFamily="34" charset="0"/>
-                <a:ea typeface="Times New Roman" pitchFamily="34" charset="-122"/>
-                <a:cs typeface="Times New Roman" pitchFamily="34" charset="-120"/>
-              </a:rPr>
-              <a:t>Unit 2 | Lecture 1</a:t>
-            </a:r>
-            <a:endParaRPr lang="en-US" sz="1600" dirty="0"/>
-          </a:p>
-        </p:txBody>
-      </p:sp>
-      <p:sp>
-        <p:nvSpPr>
-          <p:cNvPr id="6" name="Text 4"/>
-          <p:cNvSpPr/>
-          <p:nvPr/>
-        </p:nvSpPr>
-        <p:spPr>
-          <a:xfrm>
-            <a:off x="502920" y="640080"/>
-            <a:ext cx="11155680" cy="640080"/>
-          </a:xfrm>
-          <a:prstGeom prst="rect">
-            <a:avLst/>
-          </a:prstGeom>
-          <a:noFill/>
-          <a:ln/>
-        </p:spPr>
-        <p:txBody>
-          <a:bodyPr wrap="square" lIns="0" tIns="0" rIns="0" bIns="0" rtlCol="0" anchor="ctr"/>
-          <a:lstStyle/>
-          <a:p>
-            <a:pPr marL="0" indent="0">
-              <a:buNone/>
-            </a:pPr>
-            <a:r>
-              <a:rPr lang="en-US" sz="2300" b="1" dirty="0">
-                <a:solidFill>
-                  <a:srgbClr val="1F4E79"/>
-                </a:solidFill>
-                <a:latin typeface="Times New Roman" pitchFamily="34" charset="0"/>
-                <a:ea typeface="Times New Roman" pitchFamily="34" charset="-122"/>
-                <a:cs typeface="Times New Roman" pitchFamily="34" charset="-120"/>
-              </a:rPr>
-              <a:t>7. Principle: Privacy &amp; Data Governance</a:t>
-            </a:r>
-            <a:endParaRPr lang="en-US" sz="2300" dirty="0"/>
-          </a:p>
-        </p:txBody>
-      </p:sp>
-      <p:sp>
-        <p:nvSpPr>
-          <p:cNvPr id="7" name="Text 5"/>
-          <p:cNvSpPr/>
-          <p:nvPr/>
-        </p:nvSpPr>
-        <p:spPr>
-          <a:xfrm>
-            <a:off x="594360" y="1417320"/>
-            <a:ext cx="10972800" cy="4434840"/>
-          </a:xfrm>
-          <a:prstGeom prst="rect">
-            <a:avLst/>
-          </a:prstGeom>
-          <a:noFill/>
-          <a:ln/>
-        </p:spPr>
-        <p:txBody>
-          <a:bodyPr wrap="square" lIns="50800" tIns="50800" rIns="50800" bIns="50800" rtlCol="0" anchor="t"/>
-          <a:lstStyle/>
-          <a:p>
-            <a:pPr marL="0" indent="0">
-              <a:buNone/>
-            </a:pPr>
-            <a:r>
-              <a:rPr lang="en-US" sz="1800" dirty="0">
-                <a:solidFill>
-                  <a:srgbClr val="191919"/>
-                </a:solidFill>
-                <a:latin typeface="Times New Roman" pitchFamily="34" charset="0"/>
-                <a:ea typeface="Times New Roman" pitchFamily="34" charset="-122"/>
-                <a:cs typeface="Times New Roman" pitchFamily="34" charset="-120"/>
-              </a:rPr>
-              <a:t>Ensures personal and sensitive data used by an AI system is collected, stored and processed lawfully and respectfully.</a:t>
-            </a:r>
-            <a:endParaRPr lang="en-US" sz="1800" dirty="0"/>
-          </a:p>
-          <a:p>
-            <a:pPr marL="0" indent="0">
-              <a:buNone/>
-            </a:pPr>
-            <a:endParaRPr lang="en-US" sz="1800" dirty="0"/>
-          </a:p>
-          <a:p>
-            <a:pPr marL="0" indent="0">
-              <a:buNone/>
-            </a:pPr>
-            <a:r>
-              <a:rPr lang="en-US" sz="1800" dirty="0">
-                <a:solidFill>
-                  <a:srgbClr val="191919"/>
-                </a:solidFill>
-                <a:latin typeface="Times New Roman" pitchFamily="34" charset="0"/>
-                <a:ea typeface="Times New Roman" pitchFamily="34" charset="-122"/>
-                <a:cs typeface="Times New Roman" pitchFamily="34" charset="-120"/>
-              </a:rPr>
-              <a:t>Covers informed consent, data minimisation, purpose limitation and protection against misuse.</a:t>
-            </a:r>
-            <a:endParaRPr lang="en-US" sz="1800" dirty="0"/>
-          </a:p>
-          <a:p>
-            <a:pPr marL="0" indent="0">
-              <a:buNone/>
-            </a:pPr>
-            <a:endParaRPr lang="en-US" sz="1800" dirty="0"/>
-          </a:p>
-          <a:p>
-            <a:pPr marL="0" indent="0">
-              <a:buNone/>
-            </a:pPr>
-            <a:r>
-              <a:rPr lang="en-US" sz="1800" dirty="0">
-                <a:solidFill>
-                  <a:srgbClr val="191919"/>
-                </a:solidFill>
-                <a:latin typeface="Times New Roman" pitchFamily="34" charset="0"/>
-                <a:ea typeface="Times New Roman" pitchFamily="34" charset="-122"/>
-                <a:cs typeface="Times New Roman" pitchFamily="34" charset="-120"/>
-              </a:rPr>
-              <a:t>Especially critical for AI used in surveillance, healthcare and finance.</a:t>
-            </a:r>
-            <a:endParaRPr lang="en-US" sz="1800" dirty="0"/>
-          </a:p>
-          <a:p>
-            <a:pPr marL="0" indent="0">
-              <a:buNone/>
-            </a:pPr>
-            <a:endParaRPr lang="en-US" sz="1800" dirty="0"/>
-          </a:p>
-          <a:p>
-            <a:pPr marL="0" indent="0">
-              <a:buNone/>
-            </a:pPr>
-            <a:r>
-              <a:rPr lang="en-US" sz="1800" dirty="0">
-                <a:solidFill>
-                  <a:srgbClr val="191919"/>
-                </a:solidFill>
-                <a:latin typeface="Times New Roman" pitchFamily="34" charset="0"/>
-                <a:ea typeface="Times New Roman" pitchFamily="34" charset="-122"/>
-                <a:cs typeface="Times New Roman" pitchFamily="34" charset="-120"/>
-              </a:rPr>
-              <a:t>Covered in depth in Lectures 16-17 on privacy concerns and data-protection principles.</a:t>
-            </a:r>
-            <a:endParaRPr lang="en-US" sz="1800" dirty="0"/>
-          </a:p>
-        </p:txBody>
-      </p:sp>
-      <p:sp>
-        <p:nvSpPr>
-          <p:cNvPr id="8" name="Text 6"/>
-          <p:cNvSpPr/>
-          <p:nvPr/>
-        </p:nvSpPr>
-        <p:spPr>
-          <a:xfrm>
-            <a:off x="502920" y="6382512"/>
-            <a:ext cx="10744200" cy="320040"/>
-          </a:xfrm>
-          <a:prstGeom prst="rect">
-            <a:avLst/>
-          </a:prstGeom>
-          <a:noFill/>
-          <a:ln/>
-        </p:spPr>
-        <p:txBody>
-          <a:bodyPr wrap="square" lIns="0" tIns="0" rIns="0" bIns="0" rtlCol="0" anchor="ctr"/>
-          <a:lstStyle/>
-          <a:p>
-            <a:pPr marL="0" indent="0">
-              <a:buNone/>
-            </a:pPr>
-            <a:r>
-              <a:rPr lang="en-US" sz="1200" i="1" dirty="0">
-                <a:solidFill>
-                  <a:srgbClr val="595959"/>
-                </a:solidFill>
-                <a:latin typeface="Times New Roman" pitchFamily="34" charset="0"/>
-                <a:ea typeface="Times New Roman" pitchFamily="34" charset="-122"/>
-                <a:cs typeface="Times New Roman" pitchFamily="34" charset="-120"/>
-              </a:rPr>
-              <a:t>Teaching cue: A short preview is enough here - the full treatment comes in Week 6.</a:t>
-            </a:r>
-            <a:endParaRPr lang="en-US" sz="1200" dirty="0"/>
-          </a:p>
-        </p:txBody>
-      </p:sp>
-      <p:sp>
-        <p:nvSpPr>
-          <p:cNvPr id="9" name="Text 7"/>
-          <p:cNvSpPr/>
-          <p:nvPr/>
-        </p:nvSpPr>
-        <p:spPr>
-          <a:xfrm>
-            <a:off x="11430000" y="6446520"/>
-            <a:ext cx="365760" cy="182880"/>
-          </a:xfrm>
-          <a:prstGeom prst="rect">
-            <a:avLst/>
-          </a:prstGeom>
-          <a:noFill/>
-          <a:ln/>
-        </p:spPr>
-        <p:txBody>
-          <a:bodyPr wrap="square" lIns="0" tIns="0" rIns="0" bIns="0" rtlCol="0" anchor="ctr"/>
-          <a:lstStyle/>
-          <a:p>
-            <a:pPr marL="0" indent="0" algn="ctr">
-              <a:buNone/>
-            </a:pPr>
-            <a:r>
-              <a:rPr lang="en-US" sz="1200" dirty="0">
-                <a:solidFill>
-                  <a:srgbClr val="595959"/>
-                </a:solidFill>
-                <a:latin typeface="Times New Roman" pitchFamily="34" charset="0"/>
-                <a:ea typeface="Times New Roman" pitchFamily="34" charset="-122"/>
-                <a:cs typeface="Times New Roman" pitchFamily="34" charset="-120"/>
-              </a:rPr>
-              <a:t>10</a:t>
-            </a:r>
-            <a:endParaRPr lang="en-US" sz="1200" dirty="0"/>
-          </a:p>
-        </p:txBody>
-      </p:sp>
-    </p:spTree>
-  </p:cSld>
-  <p:clrMapOvr>
-    <a:masterClrMapping/>
-  </p:clrMapOvr>
-</p:sld>
-</file>
-
-<file path=ppt/slides/slide11.xml><?xml version="1.0" encoding="utf-8"?>
-<p:sld xmlns:a="http://schemas.openxmlformats.org/drawingml/2006/main" xmlns:r="http://schemas.openxmlformats.org/officeDocument/2006/relationships" xmlns:p="http://schemas.openxmlformats.org/presentationml/2006/main">
-  <p:cSld name="Slide 11">
-    <p:bg>
-      <p:bgPr>
-        <a:solidFill>
-          <a:srgbClr val="FFFFFF"/>
-        </a:solidFill>
-        <a:effectLst/>
-      </p:bgPr>
-    </p:bg>
-    <p:spTree>
-      <p:nvGrpSpPr>
-        <p:cNvPr id="1" name=""/>
-        <p:cNvGrpSpPr/>
-        <p:nvPr/>
-      </p:nvGrpSpPr>
-      <p:grpSpPr>
-        <a:xfrm>
-          <a:off x="0" y="0"/>
-          <a:ext cx="0" cy="0"/>
-          <a:chOff x="0" y="0"/>
-          <a:chExt cx="0" cy="0"/>
-        </a:xfrm>
-      </p:grpSpPr>
-      <p:sp>
-        <p:nvSpPr>
-          <p:cNvPr id="2" name="Shape 0"/>
-          <p:cNvSpPr/>
-          <p:nvPr/>
-        </p:nvSpPr>
-        <p:spPr>
-          <a:xfrm>
-            <a:off x="0" y="0"/>
-            <a:ext cx="12191695" cy="502920"/>
-          </a:xfrm>
-          <a:prstGeom prst="rect">
-            <a:avLst/>
-          </a:prstGeom>
-          <a:solidFill>
-            <a:srgbClr val="F8FBFF"/>
-          </a:solidFill>
-          <a:ln w="12700">
-            <a:solidFill>
-              <a:srgbClr val="F8FBFF"/>
-            </a:solidFill>
-            <a:prstDash val="solid"/>
-          </a:ln>
-        </p:spPr>
-        <p:txBody>
-          <a:bodyPr/>
-          <a:lstStyle/>
-          <a:p>
-            <a:endParaRPr lang="en-IN"/>
-          </a:p>
-        </p:txBody>
-      </p:sp>
-      <p:sp>
-        <p:nvSpPr>
-          <p:cNvPr id="3" name="Shape 1"/>
-          <p:cNvSpPr/>
-          <p:nvPr/>
-        </p:nvSpPr>
-        <p:spPr>
-          <a:xfrm>
-            <a:off x="0" y="475488"/>
-            <a:ext cx="12191695" cy="27432"/>
-          </a:xfrm>
-          <a:prstGeom prst="rect">
-            <a:avLst/>
-          </a:prstGeom>
-          <a:solidFill>
-            <a:srgbClr val="2E75B6"/>
-          </a:solidFill>
-          <a:ln w="12700">
-            <a:solidFill>
-              <a:srgbClr val="2E75B6"/>
-            </a:solidFill>
-            <a:prstDash val="solid"/>
-          </a:ln>
-        </p:spPr>
-        <p:txBody>
-          <a:bodyPr/>
-          <a:lstStyle/>
-          <a:p>
-            <a:endParaRPr lang="en-IN"/>
-          </a:p>
-        </p:txBody>
-      </p:sp>
-      <p:sp>
-        <p:nvSpPr>
-          <p:cNvPr id="4" name="Text 2"/>
-          <p:cNvSpPr/>
-          <p:nvPr/>
-        </p:nvSpPr>
-        <p:spPr>
-          <a:xfrm>
-            <a:off x="365760" y="73152"/>
-            <a:ext cx="6400800" cy="274320"/>
-          </a:xfrm>
-          <a:prstGeom prst="rect">
-            <a:avLst/>
-          </a:prstGeom>
-          <a:noFill/>
-          <a:ln/>
-        </p:spPr>
-        <p:txBody>
-          <a:bodyPr wrap="square" lIns="0" tIns="0" rIns="0" bIns="0" rtlCol="0" anchor="ctr"/>
-          <a:lstStyle/>
-          <a:p>
-            <a:pPr marL="0" indent="0">
-              <a:buNone/>
-            </a:pPr>
-            <a:r>
-              <a:rPr lang="en-US" sz="1800" b="1" dirty="0">
-                <a:solidFill>
-                  <a:srgbClr val="1F4E79"/>
-                </a:solidFill>
-                <a:latin typeface="Times New Roman" pitchFamily="34" charset="0"/>
-                <a:ea typeface="Times New Roman" pitchFamily="34" charset="-122"/>
-                <a:cs typeface="Times New Roman" pitchFamily="34" charset="-120"/>
-              </a:rPr>
-              <a:t>TCS349: Responsible and Explainable AI</a:t>
-            </a:r>
-            <a:endParaRPr lang="en-US" sz="1800" dirty="0"/>
-          </a:p>
-        </p:txBody>
-      </p:sp>
-      <p:sp>
-        <p:nvSpPr>
-          <p:cNvPr id="5" name="Text 3"/>
-          <p:cNvSpPr/>
-          <p:nvPr/>
-        </p:nvSpPr>
-        <p:spPr>
-          <a:xfrm>
-            <a:off x="8321040" y="82296"/>
-            <a:ext cx="3383280" cy="274320"/>
-          </a:xfrm>
-          <a:prstGeom prst="rect">
-            <a:avLst/>
-          </a:prstGeom>
-          <a:noFill/>
-          <a:ln/>
-        </p:spPr>
-        <p:txBody>
-          <a:bodyPr wrap="square" lIns="0" tIns="0" rIns="0" bIns="0" rtlCol="0" anchor="ctr"/>
-          <a:lstStyle/>
-          <a:p>
-            <a:pPr marL="0" indent="0" algn="r">
-              <a:buNone/>
-            </a:pPr>
-            <a:r>
-              <a:rPr lang="en-US" sz="1600" b="1" dirty="0">
-                <a:solidFill>
-                  <a:srgbClr val="1F4E79"/>
-                </a:solidFill>
-                <a:latin typeface="Times New Roman" pitchFamily="34" charset="0"/>
-                <a:ea typeface="Times New Roman" pitchFamily="34" charset="-122"/>
-                <a:cs typeface="Times New Roman" pitchFamily="34" charset="-120"/>
-              </a:rPr>
-              <a:t>Unit 2 | Lecture 1</a:t>
-            </a:r>
-            <a:endParaRPr lang="en-US" sz="1600" dirty="0"/>
-          </a:p>
-        </p:txBody>
-      </p:sp>
-      <p:sp>
-        <p:nvSpPr>
-          <p:cNvPr id="6" name="Text 4"/>
-          <p:cNvSpPr/>
-          <p:nvPr/>
-        </p:nvSpPr>
-        <p:spPr>
-          <a:xfrm>
-            <a:off x="502920" y="640080"/>
-            <a:ext cx="11155680" cy="640080"/>
-          </a:xfrm>
-          <a:prstGeom prst="rect">
-            <a:avLst/>
-          </a:prstGeom>
-          <a:noFill/>
-          <a:ln/>
-        </p:spPr>
-        <p:txBody>
-          <a:bodyPr wrap="square" lIns="0" tIns="0" rIns="0" bIns="0" rtlCol="0" anchor="ctr"/>
-          <a:lstStyle/>
-          <a:p>
-            <a:pPr marL="0" indent="0">
-              <a:buNone/>
-            </a:pPr>
-            <a:r>
-              <a:rPr lang="en-US" sz="2300" b="1" dirty="0">
-                <a:solidFill>
-                  <a:srgbClr val="1F4E79"/>
-                </a:solidFill>
-                <a:latin typeface="Times New Roman" pitchFamily="34" charset="0"/>
-                <a:ea typeface="Times New Roman" pitchFamily="34" charset="-122"/>
-                <a:cs typeface="Times New Roman" pitchFamily="34" charset="-120"/>
-              </a:rPr>
-              <a:t>8. Principle: Safety, Robustness &amp; Reliability</a:t>
-            </a:r>
-            <a:endParaRPr lang="en-US" sz="2300" dirty="0"/>
-          </a:p>
-        </p:txBody>
-      </p:sp>
-      <p:sp>
-        <p:nvSpPr>
-          <p:cNvPr id="7" name="Text 5"/>
-          <p:cNvSpPr/>
-          <p:nvPr/>
-        </p:nvSpPr>
-        <p:spPr>
-          <a:xfrm>
-            <a:off x="594360" y="1417320"/>
-            <a:ext cx="10972800" cy="4434840"/>
-          </a:xfrm>
-          <a:prstGeom prst="rect">
-            <a:avLst/>
-          </a:prstGeom>
-          <a:noFill/>
-          <a:ln/>
-        </p:spPr>
-        <p:txBody>
-          <a:bodyPr wrap="square" lIns="50800" tIns="50800" rIns="50800" bIns="50800" rtlCol="0" anchor="t"/>
-          <a:lstStyle/>
-          <a:p>
-            <a:pPr marL="0" indent="0">
-              <a:buNone/>
-            </a:pPr>
-            <a:r>
-              <a:rPr lang="en-US" sz="1800" dirty="0">
-                <a:solidFill>
-                  <a:srgbClr val="191919"/>
-                </a:solidFill>
-                <a:latin typeface="Times New Roman" pitchFamily="34" charset="0"/>
-                <a:ea typeface="Times New Roman" pitchFamily="34" charset="-122"/>
-                <a:cs typeface="Times New Roman" pitchFamily="34" charset="-120"/>
-              </a:rPr>
-              <a:t>Ensures an AI system performs consistently and safely, including under unexpected or adversarial conditions.</a:t>
-            </a:r>
-            <a:endParaRPr lang="en-US" sz="1800" dirty="0"/>
-          </a:p>
-          <a:p>
-            <a:pPr marL="0" indent="0">
-              <a:buNone/>
-            </a:pPr>
-            <a:endParaRPr lang="en-US" sz="1800" dirty="0"/>
-          </a:p>
-          <a:p>
-            <a:pPr marL="0" indent="0">
-              <a:buNone/>
-            </a:pPr>
-            <a:r>
-              <a:rPr lang="en-US" sz="1800" dirty="0">
-                <a:solidFill>
-                  <a:srgbClr val="191919"/>
-                </a:solidFill>
-                <a:latin typeface="Times New Roman" pitchFamily="34" charset="0"/>
-                <a:ea typeface="Times New Roman" pitchFamily="34" charset="-122"/>
-                <a:cs typeface="Times New Roman" pitchFamily="34" charset="-120"/>
-              </a:rPr>
-              <a:t>Covers testing for edge cases, resistance to manipulation, and graceful failure when the system is uncertain.</a:t>
-            </a:r>
-            <a:endParaRPr lang="en-US" sz="1800" dirty="0"/>
-          </a:p>
-          <a:p>
-            <a:pPr marL="0" indent="0">
-              <a:buNone/>
-            </a:pPr>
-            <a:endParaRPr lang="en-US" sz="1800" dirty="0"/>
-          </a:p>
-          <a:p>
-            <a:pPr marL="0" indent="0">
-              <a:buNone/>
-            </a:pPr>
-            <a:r>
-              <a:rPr lang="en-US" sz="1800" dirty="0">
-                <a:solidFill>
-                  <a:srgbClr val="191919"/>
-                </a:solidFill>
-                <a:latin typeface="Times New Roman" pitchFamily="34" charset="0"/>
-                <a:ea typeface="Times New Roman" pitchFamily="34" charset="-122"/>
-                <a:cs typeface="Times New Roman" pitchFamily="34" charset="-120"/>
-              </a:rPr>
-              <a:t>Poor robustness can silently reintroduce bias or unfairness that earlier testing failed to catch.</a:t>
-            </a:r>
-            <a:endParaRPr lang="en-US" sz="1800" dirty="0"/>
-          </a:p>
-          <a:p>
-            <a:pPr marL="0" indent="0">
-              <a:buNone/>
-            </a:pPr>
-            <a:endParaRPr lang="en-US" sz="1800" dirty="0"/>
-          </a:p>
-          <a:p>
-            <a:pPr marL="0" indent="0">
-              <a:buNone/>
-            </a:pPr>
-            <a:r>
-              <a:rPr lang="en-US" sz="1800" dirty="0">
-                <a:solidFill>
-                  <a:srgbClr val="191919"/>
-                </a:solidFill>
-                <a:latin typeface="Times New Roman" pitchFamily="34" charset="0"/>
-                <a:ea typeface="Times New Roman" pitchFamily="34" charset="-122"/>
-                <a:cs typeface="Times New Roman" pitchFamily="34" charset="-120"/>
-              </a:rPr>
-              <a:t>Works together with the other four principles rather than standing alone.</a:t>
-            </a:r>
-            <a:endParaRPr lang="en-US" sz="1800" dirty="0"/>
-          </a:p>
-        </p:txBody>
-      </p:sp>
-      <p:sp>
-        <p:nvSpPr>
-          <p:cNvPr id="8" name="Text 6"/>
-          <p:cNvSpPr/>
-          <p:nvPr/>
-        </p:nvSpPr>
-        <p:spPr>
-          <a:xfrm>
-            <a:off x="502920" y="6382512"/>
-            <a:ext cx="10744200" cy="320040"/>
-          </a:xfrm>
-          <a:prstGeom prst="rect">
-            <a:avLst/>
-          </a:prstGeom>
-          <a:noFill/>
-          <a:ln/>
-        </p:spPr>
-        <p:txBody>
-          <a:bodyPr wrap="square" lIns="0" tIns="0" rIns="0" bIns="0" rtlCol="0" anchor="ctr"/>
-          <a:lstStyle/>
-          <a:p>
-            <a:pPr marL="0" indent="0">
-              <a:buNone/>
-            </a:pPr>
-            <a:r>
-              <a:rPr lang="en-US" sz="1200" i="1" dirty="0">
-                <a:solidFill>
-                  <a:srgbClr val="595959"/>
-                </a:solidFill>
-                <a:latin typeface="Times New Roman" pitchFamily="34" charset="0"/>
-                <a:ea typeface="Times New Roman" pitchFamily="34" charset="-122"/>
-                <a:cs typeface="Times New Roman" pitchFamily="34" charset="-120"/>
-              </a:rPr>
-              <a:t>Teaching cue: This closes the five-principle overview - pause here for questions before the lifecycle section.</a:t>
-            </a:r>
-            <a:endParaRPr lang="en-US" sz="1200" dirty="0"/>
-          </a:p>
-        </p:txBody>
-      </p:sp>
-      <p:sp>
-        <p:nvSpPr>
-          <p:cNvPr id="9" name="Text 7"/>
-          <p:cNvSpPr/>
-          <p:nvPr/>
-        </p:nvSpPr>
-        <p:spPr>
-          <a:xfrm>
-            <a:off x="11430000" y="6446520"/>
-            <a:ext cx="365760" cy="182880"/>
-          </a:xfrm>
-          <a:prstGeom prst="rect">
-            <a:avLst/>
-          </a:prstGeom>
-          <a:noFill/>
-          <a:ln/>
-        </p:spPr>
-        <p:txBody>
-          <a:bodyPr wrap="square" lIns="0" tIns="0" rIns="0" bIns="0" rtlCol="0" anchor="ctr"/>
-          <a:lstStyle/>
-          <a:p>
-            <a:pPr marL="0" indent="0" algn="ctr">
-              <a:buNone/>
-            </a:pPr>
-            <a:r>
-              <a:rPr lang="en-US" sz="1200" dirty="0">
-                <a:solidFill>
-                  <a:srgbClr val="595959"/>
-                </a:solidFill>
-                <a:latin typeface="Times New Roman" pitchFamily="34" charset="0"/>
-                <a:ea typeface="Times New Roman" pitchFamily="34" charset="-122"/>
-                <a:cs typeface="Times New Roman" pitchFamily="34" charset="-120"/>
-              </a:rPr>
-              <a:t>11</a:t>
-            </a:r>
-            <a:endParaRPr lang="en-US" sz="1200" dirty="0"/>
-          </a:p>
-        </p:txBody>
-      </p:sp>
-    </p:spTree>
-  </p:cSld>
-  <p:clrMapOvr>
-    <a:masterClrMapping/>
-  </p:clrMapOvr>
-</p:sld>
-</file>
-
-<file path=ppt/slides/slide12.xml><?xml version="1.0" encoding="utf-8"?>
-<p:sld xmlns:a="http://schemas.openxmlformats.org/drawingml/2006/main" xmlns:r="http://schemas.openxmlformats.org/officeDocument/2006/relationships" xmlns:p="http://schemas.openxmlformats.org/presentationml/2006/main">
   <p:cSld name="Slide 12">
     <p:bg>
       <p:bgPr>
@@ -4116,7 +2976,7 @@
 </p:sld>
 </file>
 
-<file path=ppt/slides/slide13.xml><?xml version="1.0" encoding="utf-8"?>
+<file path=ppt/slides/slide11.xml><?xml version="1.0" encoding="utf-8"?>
 <p:sld xmlns:a="http://schemas.openxmlformats.org/drawingml/2006/main" xmlns:r="http://schemas.openxmlformats.org/officeDocument/2006/relationships" xmlns:p="http://schemas.openxmlformats.org/presentationml/2006/main">
   <p:cSld name="Slide 13">
     <p:bg>
@@ -4516,7 +3376,7 @@
 </p:sld>
 </file>
 
-<file path=ppt/slides/slide14.xml><?xml version="1.0" encoding="utf-8"?>
+<file path=ppt/slides/slide12.xml><?xml version="1.0" encoding="utf-8"?>
 <p:sld xmlns:a="http://schemas.openxmlformats.org/drawingml/2006/main" xmlns:r="http://schemas.openxmlformats.org/officeDocument/2006/relationships" xmlns:p="http://schemas.openxmlformats.org/presentationml/2006/main">
   <p:cSld name="Slide 14">
     <p:bg>
@@ -4916,7 +3776,7 @@
 </p:sld>
 </file>
 
-<file path=ppt/slides/slide15.xml><?xml version="1.0" encoding="utf-8"?>
+<file path=ppt/slides/slide13.xml><?xml version="1.0" encoding="utf-8"?>
 <p:sld xmlns:a="http://schemas.openxmlformats.org/drawingml/2006/main" xmlns:r="http://schemas.openxmlformats.org/officeDocument/2006/relationships" xmlns:p="http://schemas.openxmlformats.org/presentationml/2006/main">
   <p:cSld name="Slide 15">
     <p:bg>
@@ -5316,7 +4176,7 @@
 </p:sld>
 </file>
 
-<file path=ppt/slides/slide16.xml><?xml version="1.0" encoding="utf-8"?>
+<file path=ppt/slides/slide14.xml><?xml version="1.0" encoding="utf-8"?>
 <p:sld xmlns:a="http://schemas.openxmlformats.org/drawingml/2006/main" xmlns:r="http://schemas.openxmlformats.org/officeDocument/2006/relationships" xmlns:p="http://schemas.openxmlformats.org/presentationml/2006/main">
   <p:cSld name="Slide 16">
     <p:bg>
@@ -5716,1676 +4576,7 @@
 </p:sld>
 </file>
 
-<file path=ppt/slides/slide17.xml><?xml version="1.0" encoding="utf-8"?>
-<p:sld xmlns:a="http://schemas.openxmlformats.org/drawingml/2006/main" xmlns:r="http://schemas.openxmlformats.org/officeDocument/2006/relationships" xmlns:p="http://schemas.openxmlformats.org/presentationml/2006/main">
-  <p:cSld name="Slide 17">
-    <p:bg>
-      <p:bgPr>
-        <a:solidFill>
-          <a:srgbClr val="FFFFFF"/>
-        </a:solidFill>
-        <a:effectLst/>
-      </p:bgPr>
-    </p:bg>
-    <p:spTree>
-      <p:nvGrpSpPr>
-        <p:cNvPr id="1" name=""/>
-        <p:cNvGrpSpPr/>
-        <p:nvPr/>
-      </p:nvGrpSpPr>
-      <p:grpSpPr>
-        <a:xfrm>
-          <a:off x="0" y="0"/>
-          <a:ext cx="0" cy="0"/>
-          <a:chOff x="0" y="0"/>
-          <a:chExt cx="0" cy="0"/>
-        </a:xfrm>
-      </p:grpSpPr>
-      <p:sp>
-        <p:nvSpPr>
-          <p:cNvPr id="2" name="Shape 0"/>
-          <p:cNvSpPr/>
-          <p:nvPr/>
-        </p:nvSpPr>
-        <p:spPr>
-          <a:xfrm>
-            <a:off x="0" y="0"/>
-            <a:ext cx="12191695" cy="502920"/>
-          </a:xfrm>
-          <a:prstGeom prst="rect">
-            <a:avLst/>
-          </a:prstGeom>
-          <a:solidFill>
-            <a:srgbClr val="F8FBFF"/>
-          </a:solidFill>
-          <a:ln w="12700">
-            <a:solidFill>
-              <a:srgbClr val="F8FBFF"/>
-            </a:solidFill>
-            <a:prstDash val="solid"/>
-          </a:ln>
-        </p:spPr>
-        <p:txBody>
-          <a:bodyPr/>
-          <a:lstStyle/>
-          <a:p>
-            <a:endParaRPr lang="en-IN"/>
-          </a:p>
-        </p:txBody>
-      </p:sp>
-      <p:sp>
-        <p:nvSpPr>
-          <p:cNvPr id="3" name="Shape 1"/>
-          <p:cNvSpPr/>
-          <p:nvPr/>
-        </p:nvSpPr>
-        <p:spPr>
-          <a:xfrm>
-            <a:off x="0" y="475488"/>
-            <a:ext cx="12191695" cy="27432"/>
-          </a:xfrm>
-          <a:prstGeom prst="rect">
-            <a:avLst/>
-          </a:prstGeom>
-          <a:solidFill>
-            <a:srgbClr val="2E75B6"/>
-          </a:solidFill>
-          <a:ln w="12700">
-            <a:solidFill>
-              <a:srgbClr val="2E75B6"/>
-            </a:solidFill>
-            <a:prstDash val="solid"/>
-          </a:ln>
-        </p:spPr>
-        <p:txBody>
-          <a:bodyPr/>
-          <a:lstStyle/>
-          <a:p>
-            <a:endParaRPr lang="en-IN"/>
-          </a:p>
-        </p:txBody>
-      </p:sp>
-      <p:sp>
-        <p:nvSpPr>
-          <p:cNvPr id="4" name="Text 2"/>
-          <p:cNvSpPr/>
-          <p:nvPr/>
-        </p:nvSpPr>
-        <p:spPr>
-          <a:xfrm>
-            <a:off x="365760" y="73152"/>
-            <a:ext cx="6400800" cy="274320"/>
-          </a:xfrm>
-          <a:prstGeom prst="rect">
-            <a:avLst/>
-          </a:prstGeom>
-          <a:noFill/>
-          <a:ln/>
-        </p:spPr>
-        <p:txBody>
-          <a:bodyPr wrap="square" lIns="0" tIns="0" rIns="0" bIns="0" rtlCol="0" anchor="ctr"/>
-          <a:lstStyle/>
-          <a:p>
-            <a:pPr marL="0" indent="0">
-              <a:buNone/>
-            </a:pPr>
-            <a:r>
-              <a:rPr lang="en-US" sz="1800" b="1" dirty="0">
-                <a:solidFill>
-                  <a:srgbClr val="1F4E79"/>
-                </a:solidFill>
-                <a:latin typeface="Times New Roman" pitchFamily="34" charset="0"/>
-                <a:ea typeface="Times New Roman" pitchFamily="34" charset="-122"/>
-                <a:cs typeface="Times New Roman" pitchFamily="34" charset="-120"/>
-              </a:rPr>
-              <a:t>TCS349: Responsible and Explainable AI</a:t>
-            </a:r>
-            <a:endParaRPr lang="en-US" sz="1800" dirty="0"/>
-          </a:p>
-        </p:txBody>
-      </p:sp>
-      <p:sp>
-        <p:nvSpPr>
-          <p:cNvPr id="5" name="Text 3"/>
-          <p:cNvSpPr/>
-          <p:nvPr/>
-        </p:nvSpPr>
-        <p:spPr>
-          <a:xfrm>
-            <a:off x="8321040" y="82296"/>
-            <a:ext cx="3383280" cy="274320"/>
-          </a:xfrm>
-          <a:prstGeom prst="rect">
-            <a:avLst/>
-          </a:prstGeom>
-          <a:noFill/>
-          <a:ln/>
-        </p:spPr>
-        <p:txBody>
-          <a:bodyPr wrap="square" lIns="0" tIns="0" rIns="0" bIns="0" rtlCol="0" anchor="ctr"/>
-          <a:lstStyle/>
-          <a:p>
-            <a:pPr marL="0" indent="0" algn="r">
-              <a:buNone/>
-            </a:pPr>
-            <a:r>
-              <a:rPr lang="en-US" sz="1600" b="1" dirty="0">
-                <a:solidFill>
-                  <a:srgbClr val="1F4E79"/>
-                </a:solidFill>
-                <a:latin typeface="Times New Roman" pitchFamily="34" charset="0"/>
-                <a:ea typeface="Times New Roman" pitchFamily="34" charset="-122"/>
-                <a:cs typeface="Times New Roman" pitchFamily="34" charset="-120"/>
-              </a:rPr>
-              <a:t>Unit 2 | Lecture 1</a:t>
-            </a:r>
-            <a:endParaRPr lang="en-US" sz="1600" dirty="0"/>
-          </a:p>
-        </p:txBody>
-      </p:sp>
-      <p:sp>
-        <p:nvSpPr>
-          <p:cNvPr id="6" name="Text 4"/>
-          <p:cNvSpPr/>
-          <p:nvPr/>
-        </p:nvSpPr>
-        <p:spPr>
-          <a:xfrm>
-            <a:off x="502920" y="640080"/>
-            <a:ext cx="11155680" cy="640080"/>
-          </a:xfrm>
-          <a:prstGeom prst="rect">
-            <a:avLst/>
-          </a:prstGeom>
-          <a:noFill/>
-          <a:ln/>
-        </p:spPr>
-        <p:txBody>
-          <a:bodyPr wrap="square" lIns="0" tIns="0" rIns="0" bIns="0" rtlCol="0" anchor="ctr"/>
-          <a:lstStyle/>
-          <a:p>
-            <a:pPr marL="0" indent="0">
-              <a:buNone/>
-            </a:pPr>
-            <a:r>
-              <a:rPr lang="en-US" sz="2300" b="1" dirty="0">
-                <a:solidFill>
-                  <a:srgbClr val="1F4E79"/>
-                </a:solidFill>
-                <a:latin typeface="Times New Roman" pitchFamily="34" charset="0"/>
-                <a:ea typeface="Times New Roman" pitchFamily="34" charset="-122"/>
-                <a:cs typeface="Times New Roman" pitchFamily="34" charset="-120"/>
-              </a:rPr>
-              <a:t>Mini Classroom Activity</a:t>
-            </a:r>
-            <a:endParaRPr lang="en-US" sz="2300" dirty="0"/>
-          </a:p>
-        </p:txBody>
-      </p:sp>
-      <p:sp>
-        <p:nvSpPr>
-          <p:cNvPr id="7" name="Text 5"/>
-          <p:cNvSpPr/>
-          <p:nvPr/>
-        </p:nvSpPr>
-        <p:spPr>
-          <a:xfrm>
-            <a:off x="594360" y="1417320"/>
-            <a:ext cx="10972800" cy="4434840"/>
-          </a:xfrm>
-          <a:prstGeom prst="rect">
-            <a:avLst/>
-          </a:prstGeom>
-          <a:noFill/>
-          <a:ln/>
-        </p:spPr>
-        <p:txBody>
-          <a:bodyPr wrap="square" lIns="50800" tIns="50800" rIns="50800" bIns="50800" rtlCol="0" anchor="t"/>
-          <a:lstStyle/>
-          <a:p>
-            <a:pPr marL="0" indent="0">
-              <a:buNone/>
-            </a:pPr>
-            <a:r>
-              <a:rPr lang="en-US" sz="1800" dirty="0">
-                <a:solidFill>
-                  <a:srgbClr val="191919"/>
-                </a:solidFill>
-                <a:latin typeface="Times New Roman" pitchFamily="34" charset="0"/>
-                <a:ea typeface="Times New Roman" pitchFamily="34" charset="-122"/>
-                <a:cs typeface="Times New Roman" pitchFamily="34" charset="-120"/>
-              </a:rPr>
-              <a:t>Form groups of 3-4 students.</a:t>
-            </a:r>
-            <a:endParaRPr lang="en-US" sz="1800" dirty="0"/>
-          </a:p>
-          <a:p>
-            <a:pPr marL="0" indent="0">
-              <a:buNone/>
-            </a:pPr>
-            <a:endParaRPr lang="en-US" sz="1800" dirty="0"/>
-          </a:p>
-          <a:p>
-            <a:pPr marL="0" indent="0">
-              <a:buNone/>
-            </a:pPr>
-            <a:r>
-              <a:rPr lang="en-US" sz="1800" dirty="0">
-                <a:solidFill>
-                  <a:srgbClr val="191919"/>
-                </a:solidFill>
-                <a:latin typeface="Times New Roman" pitchFamily="34" charset="0"/>
-                <a:ea typeface="Times New Roman" pitchFamily="34" charset="-122"/>
-                <a:cs typeface="Times New Roman" pitchFamily="34" charset="-120"/>
-              </a:rPr>
-              <a:t>Choose a familiar AI system - a recommendation app, a resume-screening tool, or a navigation app.</a:t>
-            </a:r>
-            <a:endParaRPr lang="en-US" sz="1800" dirty="0"/>
-          </a:p>
-          <a:p>
-            <a:pPr marL="0" indent="0">
-              <a:buNone/>
-            </a:pPr>
-            <a:endParaRPr lang="en-US" sz="1800" dirty="0"/>
-          </a:p>
-          <a:p>
-            <a:pPr marL="0" indent="0">
-              <a:buNone/>
-            </a:pPr>
-            <a:r>
-              <a:rPr lang="en-US" sz="1800" dirty="0">
-                <a:solidFill>
-                  <a:srgbClr val="191919"/>
-                </a:solidFill>
-                <a:latin typeface="Times New Roman" pitchFamily="34" charset="0"/>
-                <a:ea typeface="Times New Roman" pitchFamily="34" charset="-122"/>
-                <a:cs typeface="Times New Roman" pitchFamily="34" charset="-120"/>
-              </a:rPr>
-              <a:t>Map it against the five Responsible AI principles: identify one strength and one gap for each.</a:t>
-            </a:r>
-            <a:endParaRPr lang="en-US" sz="1800" dirty="0"/>
-          </a:p>
-          <a:p>
-            <a:pPr marL="0" indent="0">
-              <a:buNone/>
-            </a:pPr>
-            <a:endParaRPr lang="en-US" sz="1800" dirty="0"/>
-          </a:p>
-          <a:p>
-            <a:pPr marL="0" indent="0">
-              <a:buNone/>
-            </a:pPr>
-            <a:r>
-              <a:rPr lang="en-US" sz="1800" dirty="0">
-                <a:solidFill>
-                  <a:srgbClr val="191919"/>
-                </a:solidFill>
-                <a:latin typeface="Times New Roman" pitchFamily="34" charset="0"/>
-                <a:ea typeface="Times New Roman" pitchFamily="34" charset="-122"/>
-                <a:cs typeface="Times New Roman" pitchFamily="34" charset="-120"/>
-              </a:rPr>
-              <a:t>Identify which lifecycle stage its biggest weakness most likely originates from.</a:t>
-            </a:r>
-            <a:endParaRPr lang="en-US" sz="1800" dirty="0"/>
-          </a:p>
-          <a:p>
-            <a:pPr marL="0" indent="0">
-              <a:buNone/>
-            </a:pPr>
-            <a:endParaRPr lang="en-US" sz="1800" dirty="0"/>
-          </a:p>
-          <a:p>
-            <a:pPr marL="0" indent="0">
-              <a:buNone/>
-            </a:pPr>
-            <a:r>
-              <a:rPr lang="en-US" sz="1800" dirty="0">
-                <a:solidFill>
-                  <a:srgbClr val="191919"/>
-                </a:solidFill>
-                <a:latin typeface="Times New Roman" pitchFamily="34" charset="0"/>
-                <a:ea typeface="Times New Roman" pitchFamily="34" charset="-122"/>
-                <a:cs typeface="Times New Roman" pitchFamily="34" charset="-120"/>
-              </a:rPr>
-              <a:t>Each group shares one finding in 1 minute.</a:t>
-            </a:r>
-            <a:endParaRPr lang="en-US" sz="1800" dirty="0"/>
-          </a:p>
-        </p:txBody>
-      </p:sp>
-      <p:sp>
-        <p:nvSpPr>
-          <p:cNvPr id="8" name="Text 6"/>
-          <p:cNvSpPr/>
-          <p:nvPr/>
-        </p:nvSpPr>
-        <p:spPr>
-          <a:xfrm>
-            <a:off x="502920" y="6382512"/>
-            <a:ext cx="10744200" cy="320040"/>
-          </a:xfrm>
-          <a:prstGeom prst="rect">
-            <a:avLst/>
-          </a:prstGeom>
-          <a:noFill/>
-          <a:ln/>
-        </p:spPr>
-        <p:txBody>
-          <a:bodyPr wrap="square" lIns="0" tIns="0" rIns="0" bIns="0" rtlCol="0" anchor="ctr"/>
-          <a:lstStyle/>
-          <a:p>
-            <a:pPr marL="0" indent="0">
-              <a:buNone/>
-            </a:pPr>
-            <a:r>
-              <a:rPr lang="en-US" sz="1200" i="1" dirty="0">
-                <a:solidFill>
-                  <a:srgbClr val="595959"/>
-                </a:solidFill>
-                <a:latin typeface="Times New Roman" pitchFamily="34" charset="0"/>
-                <a:ea typeface="Times New Roman" pitchFamily="34" charset="-122"/>
-                <a:cs typeface="Times New Roman" pitchFamily="34" charset="-120"/>
-              </a:rPr>
-              <a:t>Teaching cue: This activity checks whether students can apply the five-principle framework to a real system.</a:t>
-            </a:r>
-            <a:endParaRPr lang="en-US" sz="1200" dirty="0"/>
-          </a:p>
-        </p:txBody>
-      </p:sp>
-      <p:sp>
-        <p:nvSpPr>
-          <p:cNvPr id="9" name="Text 7"/>
-          <p:cNvSpPr/>
-          <p:nvPr/>
-        </p:nvSpPr>
-        <p:spPr>
-          <a:xfrm>
-            <a:off x="11430000" y="6446520"/>
-            <a:ext cx="365760" cy="182880"/>
-          </a:xfrm>
-          <a:prstGeom prst="rect">
-            <a:avLst/>
-          </a:prstGeom>
-          <a:noFill/>
-          <a:ln/>
-        </p:spPr>
-        <p:txBody>
-          <a:bodyPr wrap="square" lIns="0" tIns="0" rIns="0" bIns="0" rtlCol="0" anchor="ctr"/>
-          <a:lstStyle/>
-          <a:p>
-            <a:pPr marL="0" indent="0" algn="ctr">
-              <a:buNone/>
-            </a:pPr>
-            <a:r>
-              <a:rPr lang="en-US" sz="1200" dirty="0">
-                <a:solidFill>
-                  <a:srgbClr val="595959"/>
-                </a:solidFill>
-                <a:latin typeface="Times New Roman" pitchFamily="34" charset="0"/>
-                <a:ea typeface="Times New Roman" pitchFamily="34" charset="-122"/>
-                <a:cs typeface="Times New Roman" pitchFamily="34" charset="-120"/>
-              </a:rPr>
-              <a:t>17</a:t>
-            </a:r>
-            <a:endParaRPr lang="en-US" sz="1200" dirty="0"/>
-          </a:p>
-        </p:txBody>
-      </p:sp>
-    </p:spTree>
-  </p:cSld>
-  <p:clrMapOvr>
-    <a:masterClrMapping/>
-  </p:clrMapOvr>
-</p:sld>
-</file>
-
-<file path=ppt/slides/slide18.xml><?xml version="1.0" encoding="utf-8"?>
-<p:sld xmlns:a="http://schemas.openxmlformats.org/drawingml/2006/main" xmlns:r="http://schemas.openxmlformats.org/officeDocument/2006/relationships" xmlns:p="http://schemas.openxmlformats.org/presentationml/2006/main">
-  <p:cSld name="Slide 18">
-    <p:bg>
-      <p:bgPr>
-        <a:solidFill>
-          <a:srgbClr val="FFFFFF"/>
-        </a:solidFill>
-        <a:effectLst/>
-      </p:bgPr>
-    </p:bg>
-    <p:spTree>
-      <p:nvGrpSpPr>
-        <p:cNvPr id="1" name=""/>
-        <p:cNvGrpSpPr/>
-        <p:nvPr/>
-      </p:nvGrpSpPr>
-      <p:grpSpPr>
-        <a:xfrm>
-          <a:off x="0" y="0"/>
-          <a:ext cx="0" cy="0"/>
-          <a:chOff x="0" y="0"/>
-          <a:chExt cx="0" cy="0"/>
-        </a:xfrm>
-      </p:grpSpPr>
-      <p:sp>
-        <p:nvSpPr>
-          <p:cNvPr id="2" name="Shape 0"/>
-          <p:cNvSpPr/>
-          <p:nvPr/>
-        </p:nvSpPr>
-        <p:spPr>
-          <a:xfrm>
-            <a:off x="0" y="0"/>
-            <a:ext cx="12191695" cy="502920"/>
-          </a:xfrm>
-          <a:prstGeom prst="rect">
-            <a:avLst/>
-          </a:prstGeom>
-          <a:solidFill>
-            <a:srgbClr val="F8FBFF"/>
-          </a:solidFill>
-          <a:ln w="12700">
-            <a:solidFill>
-              <a:srgbClr val="F8FBFF"/>
-            </a:solidFill>
-            <a:prstDash val="solid"/>
-          </a:ln>
-        </p:spPr>
-        <p:txBody>
-          <a:bodyPr/>
-          <a:lstStyle/>
-          <a:p>
-            <a:endParaRPr lang="en-IN"/>
-          </a:p>
-        </p:txBody>
-      </p:sp>
-      <p:sp>
-        <p:nvSpPr>
-          <p:cNvPr id="3" name="Shape 1"/>
-          <p:cNvSpPr/>
-          <p:nvPr/>
-        </p:nvSpPr>
-        <p:spPr>
-          <a:xfrm>
-            <a:off x="0" y="475488"/>
-            <a:ext cx="12191695" cy="27432"/>
-          </a:xfrm>
-          <a:prstGeom prst="rect">
-            <a:avLst/>
-          </a:prstGeom>
-          <a:solidFill>
-            <a:srgbClr val="2E75B6"/>
-          </a:solidFill>
-          <a:ln w="12700">
-            <a:solidFill>
-              <a:srgbClr val="2E75B6"/>
-            </a:solidFill>
-            <a:prstDash val="solid"/>
-          </a:ln>
-        </p:spPr>
-        <p:txBody>
-          <a:bodyPr/>
-          <a:lstStyle/>
-          <a:p>
-            <a:endParaRPr lang="en-IN"/>
-          </a:p>
-        </p:txBody>
-      </p:sp>
-      <p:sp>
-        <p:nvSpPr>
-          <p:cNvPr id="4" name="Text 2"/>
-          <p:cNvSpPr/>
-          <p:nvPr/>
-        </p:nvSpPr>
-        <p:spPr>
-          <a:xfrm>
-            <a:off x="365760" y="73152"/>
-            <a:ext cx="6400800" cy="274320"/>
-          </a:xfrm>
-          <a:prstGeom prst="rect">
-            <a:avLst/>
-          </a:prstGeom>
-          <a:noFill/>
-          <a:ln/>
-        </p:spPr>
-        <p:txBody>
-          <a:bodyPr wrap="square" lIns="0" tIns="0" rIns="0" bIns="0" rtlCol="0" anchor="ctr"/>
-          <a:lstStyle/>
-          <a:p>
-            <a:pPr marL="0" indent="0">
-              <a:buNone/>
-            </a:pPr>
-            <a:r>
-              <a:rPr lang="en-US" sz="1800" b="1" dirty="0">
-                <a:solidFill>
-                  <a:srgbClr val="1F4E79"/>
-                </a:solidFill>
-                <a:latin typeface="Times New Roman" pitchFamily="34" charset="0"/>
-                <a:ea typeface="Times New Roman" pitchFamily="34" charset="-122"/>
-                <a:cs typeface="Times New Roman" pitchFamily="34" charset="-120"/>
-              </a:rPr>
-              <a:t>TCS349: Responsible and Explainable AI</a:t>
-            </a:r>
-            <a:endParaRPr lang="en-US" sz="1800" dirty="0"/>
-          </a:p>
-        </p:txBody>
-      </p:sp>
-      <p:sp>
-        <p:nvSpPr>
-          <p:cNvPr id="5" name="Text 3"/>
-          <p:cNvSpPr/>
-          <p:nvPr/>
-        </p:nvSpPr>
-        <p:spPr>
-          <a:xfrm>
-            <a:off x="8321040" y="82296"/>
-            <a:ext cx="3383280" cy="274320"/>
-          </a:xfrm>
-          <a:prstGeom prst="rect">
-            <a:avLst/>
-          </a:prstGeom>
-          <a:noFill/>
-          <a:ln/>
-        </p:spPr>
-        <p:txBody>
-          <a:bodyPr wrap="square" lIns="0" tIns="0" rIns="0" bIns="0" rtlCol="0" anchor="ctr"/>
-          <a:lstStyle/>
-          <a:p>
-            <a:pPr marL="0" indent="0" algn="r">
-              <a:buNone/>
-            </a:pPr>
-            <a:r>
-              <a:rPr lang="en-US" sz="1600" b="1" dirty="0">
-                <a:solidFill>
-                  <a:srgbClr val="1F4E79"/>
-                </a:solidFill>
-                <a:latin typeface="Times New Roman" pitchFamily="34" charset="0"/>
-                <a:ea typeface="Times New Roman" pitchFamily="34" charset="-122"/>
-                <a:cs typeface="Times New Roman" pitchFamily="34" charset="-120"/>
-              </a:rPr>
-              <a:t>Unit 2 | Lecture 1</a:t>
-            </a:r>
-            <a:endParaRPr lang="en-US" sz="1600" dirty="0"/>
-          </a:p>
-        </p:txBody>
-      </p:sp>
-      <p:sp>
-        <p:nvSpPr>
-          <p:cNvPr id="6" name="Text 4"/>
-          <p:cNvSpPr/>
-          <p:nvPr/>
-        </p:nvSpPr>
-        <p:spPr>
-          <a:xfrm>
-            <a:off x="502920" y="640080"/>
-            <a:ext cx="11155680" cy="640080"/>
-          </a:xfrm>
-          <a:prstGeom prst="rect">
-            <a:avLst/>
-          </a:prstGeom>
-          <a:noFill/>
-          <a:ln/>
-        </p:spPr>
-        <p:txBody>
-          <a:bodyPr wrap="square" lIns="0" tIns="0" rIns="0" bIns="0" rtlCol="0" anchor="ctr"/>
-          <a:lstStyle/>
-          <a:p>
-            <a:pPr marL="0" indent="0">
-              <a:buNone/>
-            </a:pPr>
-            <a:r>
-              <a:rPr lang="en-US" sz="2300" b="1" dirty="0">
-                <a:solidFill>
-                  <a:srgbClr val="1F4E79"/>
-                </a:solidFill>
-                <a:latin typeface="Times New Roman" pitchFamily="34" charset="0"/>
-                <a:ea typeface="Times New Roman" pitchFamily="34" charset="-122"/>
-                <a:cs typeface="Times New Roman" pitchFamily="34" charset="-120"/>
-              </a:rPr>
-              <a:t>Recap and Exit Questions</a:t>
-            </a:r>
-            <a:endParaRPr lang="en-US" sz="2300" dirty="0"/>
-          </a:p>
-        </p:txBody>
-      </p:sp>
-      <p:sp>
-        <p:nvSpPr>
-          <p:cNvPr id="7" name="Text 5"/>
-          <p:cNvSpPr/>
-          <p:nvPr/>
-        </p:nvSpPr>
-        <p:spPr>
-          <a:xfrm>
-            <a:off x="594360" y="1417320"/>
-            <a:ext cx="10972800" cy="4434840"/>
-          </a:xfrm>
-          <a:prstGeom prst="rect">
-            <a:avLst/>
-          </a:prstGeom>
-          <a:noFill/>
-          <a:ln/>
-        </p:spPr>
-        <p:txBody>
-          <a:bodyPr wrap="square" lIns="50800" tIns="50800" rIns="50800" bIns="50800" rtlCol="0" anchor="t"/>
-          <a:lstStyle/>
-          <a:p>
-            <a:pPr marL="0" indent="0">
-              <a:buNone/>
-            </a:pPr>
-            <a:r>
-              <a:rPr lang="en-US" sz="1800" dirty="0">
-                <a:solidFill>
-                  <a:srgbClr val="191919"/>
-                </a:solidFill>
-                <a:latin typeface="Times New Roman" pitchFamily="34" charset="0"/>
-                <a:ea typeface="Times New Roman" pitchFamily="34" charset="-122"/>
-                <a:cs typeface="Times New Roman" pitchFamily="34" charset="-120"/>
-              </a:rPr>
-              <a:t>Responsible AI is an umbrella of principles: fairness, transparency, accountability, privacy, and safety/robustness.</a:t>
-            </a:r>
-            <a:endParaRPr lang="en-US" sz="1800" dirty="0"/>
-          </a:p>
-          <a:p>
-            <a:pPr marL="0" indent="0">
-              <a:buNone/>
-            </a:pPr>
-            <a:endParaRPr lang="en-US" sz="1800" dirty="0"/>
-          </a:p>
-          <a:p>
-            <a:pPr marL="0" indent="0">
-              <a:buNone/>
-            </a:pPr>
-            <a:r>
-              <a:rPr lang="en-US" sz="1800" dirty="0">
-                <a:solidFill>
-                  <a:srgbClr val="191919"/>
-                </a:solidFill>
-                <a:latin typeface="Times New Roman" pitchFamily="34" charset="0"/>
-                <a:ea typeface="Times New Roman" pitchFamily="34" charset="-122"/>
-                <a:cs typeface="Times New Roman" pitchFamily="34" charset="-120"/>
-              </a:rPr>
-              <a:t>A trustworthy AI lifecycle applies these principles continuously, from design through monitoring and retirement.</a:t>
-            </a:r>
-            <a:endParaRPr lang="en-US" sz="1800" dirty="0"/>
-          </a:p>
-          <a:p>
-            <a:pPr marL="0" indent="0">
-              <a:buNone/>
-            </a:pPr>
-            <a:endParaRPr lang="en-US" sz="1800" dirty="0"/>
-          </a:p>
-          <a:p>
-            <a:pPr marL="0" indent="0">
-              <a:buNone/>
-            </a:pPr>
-            <a:r>
-              <a:rPr lang="en-US" sz="1800" dirty="0">
-                <a:solidFill>
-                  <a:srgbClr val="191919"/>
-                </a:solidFill>
-                <a:latin typeface="Times New Roman" pitchFamily="34" charset="0"/>
-                <a:ea typeface="Times New Roman" pitchFamily="34" charset="-122"/>
-                <a:cs typeface="Times New Roman" pitchFamily="34" charset="-120"/>
-              </a:rPr>
-              <a:t>1. Name the five core principles of Responsible AI.</a:t>
-            </a:r>
-            <a:endParaRPr lang="en-US" sz="1800" dirty="0"/>
-          </a:p>
-          <a:p>
-            <a:pPr marL="0" indent="0">
-              <a:buNone/>
-            </a:pPr>
-            <a:endParaRPr lang="en-US" sz="1800" dirty="0"/>
-          </a:p>
-          <a:p>
-            <a:pPr marL="0" indent="0">
-              <a:buNone/>
-            </a:pPr>
-            <a:r>
-              <a:rPr lang="en-US" sz="1800" dirty="0">
-                <a:solidFill>
-                  <a:srgbClr val="191919"/>
-                </a:solidFill>
-                <a:latin typeface="Times New Roman" pitchFamily="34" charset="0"/>
-                <a:ea typeface="Times New Roman" pitchFamily="34" charset="-122"/>
-                <a:cs typeface="Times New Roman" pitchFamily="34" charset="-120"/>
-              </a:rPr>
-              <a:t>2. Why is fairness alone not sufficient for a trustworthy AI system?</a:t>
-            </a:r>
-            <a:endParaRPr lang="en-US" sz="1800" dirty="0"/>
-          </a:p>
-          <a:p>
-            <a:pPr marL="0" indent="0">
-              <a:buNone/>
-            </a:pPr>
-            <a:endParaRPr lang="en-US" sz="1800" dirty="0"/>
-          </a:p>
-          <a:p>
-            <a:pPr marL="0" indent="0">
-              <a:buNone/>
-            </a:pPr>
-            <a:r>
-              <a:rPr lang="en-US" sz="1800" dirty="0">
-                <a:solidFill>
-                  <a:srgbClr val="191919"/>
-                </a:solidFill>
-                <a:latin typeface="Times New Roman" pitchFamily="34" charset="0"/>
-                <a:ea typeface="Times New Roman" pitchFamily="34" charset="-122"/>
-                <a:cs typeface="Times New Roman" pitchFamily="34" charset="-120"/>
-              </a:rPr>
-              <a:t>3. At which lifecycle stage would you most likely catch a data-representativeness problem?</a:t>
-            </a:r>
-            <a:endParaRPr lang="en-US" sz="1800" dirty="0"/>
-          </a:p>
-        </p:txBody>
-      </p:sp>
-      <p:sp>
-        <p:nvSpPr>
-          <p:cNvPr id="8" name="Text 6"/>
-          <p:cNvSpPr/>
-          <p:nvPr/>
-        </p:nvSpPr>
-        <p:spPr>
-          <a:xfrm>
-            <a:off x="502920" y="6382512"/>
-            <a:ext cx="10744200" cy="320040"/>
-          </a:xfrm>
-          <a:prstGeom prst="rect">
-            <a:avLst/>
-          </a:prstGeom>
-          <a:noFill/>
-          <a:ln/>
-        </p:spPr>
-        <p:txBody>
-          <a:bodyPr wrap="square" lIns="0" tIns="0" rIns="0" bIns="0" rtlCol="0" anchor="ctr"/>
-          <a:lstStyle/>
-          <a:p>
-            <a:pPr marL="0" indent="0">
-              <a:buNone/>
-            </a:pPr>
-            <a:r>
-              <a:rPr lang="en-US" sz="1200" i="1" dirty="0">
-                <a:solidFill>
-                  <a:srgbClr val="595959"/>
-                </a:solidFill>
-                <a:latin typeface="Times New Roman" pitchFamily="34" charset="0"/>
-                <a:ea typeface="Times New Roman" pitchFamily="34" charset="-122"/>
-                <a:cs typeface="Times New Roman" pitchFamily="34" charset="-120"/>
-              </a:rPr>
-              <a:t>Next Lecture: Transparency in AI - meaning, importance, traceability and communication of limitations.</a:t>
-            </a:r>
-            <a:endParaRPr lang="en-US" sz="1200" dirty="0"/>
-          </a:p>
-        </p:txBody>
-      </p:sp>
-      <p:sp>
-        <p:nvSpPr>
-          <p:cNvPr id="9" name="Text 7"/>
-          <p:cNvSpPr/>
-          <p:nvPr/>
-        </p:nvSpPr>
-        <p:spPr>
-          <a:xfrm>
-            <a:off x="11430000" y="6446520"/>
-            <a:ext cx="365760" cy="182880"/>
-          </a:xfrm>
-          <a:prstGeom prst="rect">
-            <a:avLst/>
-          </a:prstGeom>
-          <a:noFill/>
-          <a:ln/>
-        </p:spPr>
-        <p:txBody>
-          <a:bodyPr wrap="square" lIns="0" tIns="0" rIns="0" bIns="0" rtlCol="0" anchor="ctr"/>
-          <a:lstStyle/>
-          <a:p>
-            <a:pPr marL="0" indent="0" algn="ctr">
-              <a:buNone/>
-            </a:pPr>
-            <a:r>
-              <a:rPr lang="en-US" sz="1200" dirty="0">
-                <a:solidFill>
-                  <a:srgbClr val="595959"/>
-                </a:solidFill>
-                <a:latin typeface="Times New Roman" pitchFamily="34" charset="0"/>
-                <a:ea typeface="Times New Roman" pitchFamily="34" charset="-122"/>
-                <a:cs typeface="Times New Roman" pitchFamily="34" charset="-120"/>
-              </a:rPr>
-              <a:t>18</a:t>
-            </a:r>
-            <a:endParaRPr lang="en-US" sz="1200" dirty="0"/>
-          </a:p>
-        </p:txBody>
-      </p:sp>
-    </p:spTree>
-  </p:cSld>
-  <p:clrMapOvr>
-    <a:masterClrMapping/>
-  </p:clrMapOvr>
-</p:sld>
-</file>
-
 <file path=ppt/slides/slide2.xml><?xml version="1.0" encoding="utf-8"?>
-<p:sld xmlns:a="http://schemas.openxmlformats.org/drawingml/2006/main" xmlns:r="http://schemas.openxmlformats.org/officeDocument/2006/relationships" xmlns:p="http://schemas.openxmlformats.org/presentationml/2006/main">
-  <p:cSld name="Slide 2">
-    <p:bg>
-      <p:bgPr>
-        <a:solidFill>
-          <a:srgbClr val="FFFFFF"/>
-        </a:solidFill>
-        <a:effectLst/>
-      </p:bgPr>
-    </p:bg>
-    <p:spTree>
-      <p:nvGrpSpPr>
-        <p:cNvPr id="1" name=""/>
-        <p:cNvGrpSpPr/>
-        <p:nvPr/>
-      </p:nvGrpSpPr>
-      <p:grpSpPr>
-        <a:xfrm>
-          <a:off x="0" y="0"/>
-          <a:ext cx="0" cy="0"/>
-          <a:chOff x="0" y="0"/>
-          <a:chExt cx="0" cy="0"/>
-        </a:xfrm>
-      </p:grpSpPr>
-      <p:sp>
-        <p:nvSpPr>
-          <p:cNvPr id="2" name="Shape 0"/>
-          <p:cNvSpPr/>
-          <p:nvPr/>
-        </p:nvSpPr>
-        <p:spPr>
-          <a:xfrm>
-            <a:off x="0" y="0"/>
-            <a:ext cx="12191695" cy="502920"/>
-          </a:xfrm>
-          <a:prstGeom prst="rect">
-            <a:avLst/>
-          </a:prstGeom>
-          <a:solidFill>
-            <a:srgbClr val="F8FBFF"/>
-          </a:solidFill>
-          <a:ln w="12700">
-            <a:solidFill>
-              <a:srgbClr val="F8FBFF"/>
-            </a:solidFill>
-            <a:prstDash val="solid"/>
-          </a:ln>
-        </p:spPr>
-        <p:txBody>
-          <a:bodyPr/>
-          <a:lstStyle/>
-          <a:p>
-            <a:endParaRPr lang="en-IN"/>
-          </a:p>
-        </p:txBody>
-      </p:sp>
-      <p:sp>
-        <p:nvSpPr>
-          <p:cNvPr id="3" name="Shape 1"/>
-          <p:cNvSpPr/>
-          <p:nvPr/>
-        </p:nvSpPr>
-        <p:spPr>
-          <a:xfrm>
-            <a:off x="0" y="475488"/>
-            <a:ext cx="12191695" cy="27432"/>
-          </a:xfrm>
-          <a:prstGeom prst="rect">
-            <a:avLst/>
-          </a:prstGeom>
-          <a:solidFill>
-            <a:srgbClr val="2E75B6"/>
-          </a:solidFill>
-          <a:ln w="12700">
-            <a:solidFill>
-              <a:srgbClr val="2E75B6"/>
-            </a:solidFill>
-            <a:prstDash val="solid"/>
-          </a:ln>
-        </p:spPr>
-        <p:txBody>
-          <a:bodyPr/>
-          <a:lstStyle/>
-          <a:p>
-            <a:endParaRPr lang="en-IN"/>
-          </a:p>
-        </p:txBody>
-      </p:sp>
-      <p:sp>
-        <p:nvSpPr>
-          <p:cNvPr id="4" name="Text 2"/>
-          <p:cNvSpPr/>
-          <p:nvPr/>
-        </p:nvSpPr>
-        <p:spPr>
-          <a:xfrm>
-            <a:off x="365760" y="73152"/>
-            <a:ext cx="6400800" cy="274320"/>
-          </a:xfrm>
-          <a:prstGeom prst="rect">
-            <a:avLst/>
-          </a:prstGeom>
-          <a:noFill/>
-          <a:ln/>
-        </p:spPr>
-        <p:txBody>
-          <a:bodyPr wrap="square" lIns="0" tIns="0" rIns="0" bIns="0" rtlCol="0" anchor="ctr"/>
-          <a:lstStyle/>
-          <a:p>
-            <a:pPr marL="0" indent="0">
-              <a:buNone/>
-            </a:pPr>
-            <a:r>
-              <a:rPr lang="en-US" sz="1800" b="1" dirty="0">
-                <a:solidFill>
-                  <a:srgbClr val="1F4E79"/>
-                </a:solidFill>
-                <a:latin typeface="Times New Roman" pitchFamily="34" charset="0"/>
-                <a:ea typeface="Times New Roman" pitchFamily="34" charset="-122"/>
-                <a:cs typeface="Times New Roman" pitchFamily="34" charset="-120"/>
-              </a:rPr>
-              <a:t>TCS349: Responsible and Explainable AI</a:t>
-            </a:r>
-            <a:endParaRPr lang="en-US" sz="1800" dirty="0"/>
-          </a:p>
-        </p:txBody>
-      </p:sp>
-      <p:sp>
-        <p:nvSpPr>
-          <p:cNvPr id="5" name="Text 3"/>
-          <p:cNvSpPr/>
-          <p:nvPr/>
-        </p:nvSpPr>
-        <p:spPr>
-          <a:xfrm>
-            <a:off x="8321040" y="82296"/>
-            <a:ext cx="3383280" cy="274320"/>
-          </a:xfrm>
-          <a:prstGeom prst="rect">
-            <a:avLst/>
-          </a:prstGeom>
-          <a:noFill/>
-          <a:ln/>
-        </p:spPr>
-        <p:txBody>
-          <a:bodyPr wrap="square" lIns="0" tIns="0" rIns="0" bIns="0" rtlCol="0" anchor="ctr"/>
-          <a:lstStyle/>
-          <a:p>
-            <a:pPr marL="0" indent="0" algn="r">
-              <a:buNone/>
-            </a:pPr>
-            <a:r>
-              <a:rPr lang="en-US" sz="1600" b="1" dirty="0">
-                <a:solidFill>
-                  <a:srgbClr val="1F4E79"/>
-                </a:solidFill>
-                <a:latin typeface="Times New Roman" pitchFamily="34" charset="0"/>
-                <a:ea typeface="Times New Roman" pitchFamily="34" charset="-122"/>
-                <a:cs typeface="Times New Roman" pitchFamily="34" charset="-120"/>
-              </a:rPr>
-              <a:t>Unit 2 | Lecture 1</a:t>
-            </a:r>
-            <a:endParaRPr lang="en-US" sz="1600" dirty="0"/>
-          </a:p>
-        </p:txBody>
-      </p:sp>
-      <p:sp>
-        <p:nvSpPr>
-          <p:cNvPr id="6" name="Text 4"/>
-          <p:cNvSpPr/>
-          <p:nvPr/>
-        </p:nvSpPr>
-        <p:spPr>
-          <a:xfrm>
-            <a:off x="502920" y="640080"/>
-            <a:ext cx="11155680" cy="640080"/>
-          </a:xfrm>
-          <a:prstGeom prst="rect">
-            <a:avLst/>
-          </a:prstGeom>
-          <a:noFill/>
-          <a:ln/>
-        </p:spPr>
-        <p:txBody>
-          <a:bodyPr wrap="square" lIns="0" tIns="0" rIns="0" bIns="0" rtlCol="0" anchor="ctr"/>
-          <a:lstStyle/>
-          <a:p>
-            <a:pPr marL="0" indent="0">
-              <a:buNone/>
-            </a:pPr>
-            <a:r>
-              <a:rPr lang="en-US" sz="2300" b="1" dirty="0">
-                <a:solidFill>
-                  <a:srgbClr val="1F4E79"/>
-                </a:solidFill>
-                <a:latin typeface="Times New Roman" pitchFamily="34" charset="0"/>
-                <a:ea typeface="Times New Roman" pitchFamily="34" charset="-122"/>
-                <a:cs typeface="Times New Roman" pitchFamily="34" charset="-120"/>
-              </a:rPr>
-              <a:t>Where are we?</a:t>
-            </a:r>
-            <a:endParaRPr lang="en-US" sz="2300" dirty="0"/>
-          </a:p>
-        </p:txBody>
-      </p:sp>
-      <p:sp>
-        <p:nvSpPr>
-          <p:cNvPr id="7" name="Text 5"/>
-          <p:cNvSpPr/>
-          <p:nvPr/>
-        </p:nvSpPr>
-        <p:spPr>
-          <a:xfrm>
-            <a:off x="594360" y="1417320"/>
-            <a:ext cx="10972800" cy="4434840"/>
-          </a:xfrm>
-          <a:prstGeom prst="rect">
-            <a:avLst/>
-          </a:prstGeom>
-          <a:noFill/>
-          <a:ln/>
-        </p:spPr>
-        <p:txBody>
-          <a:bodyPr wrap="square" lIns="50800" tIns="50800" rIns="50800" bIns="50800" rtlCol="0" anchor="t"/>
-          <a:lstStyle/>
-          <a:p>
-            <a:pPr marL="0" indent="0">
-              <a:buNone/>
-            </a:pPr>
-            <a:r>
-              <a:rPr lang="en-US" sz="1800" dirty="0">
-                <a:solidFill>
-                  <a:srgbClr val="191919"/>
-                </a:solidFill>
-                <a:latin typeface="Times New Roman" pitchFamily="34" charset="0"/>
-                <a:ea typeface="Times New Roman" pitchFamily="34" charset="-122"/>
-                <a:cs typeface="Times New Roman" pitchFamily="34" charset="-120"/>
-              </a:rPr>
-              <a:t>Unit I (Lectures 1-9): Ethics, bias and fairness - detecting and reasoning about unfair AI outcomes.</a:t>
-            </a:r>
-            <a:endParaRPr lang="en-US" sz="1800" dirty="0"/>
-          </a:p>
-          <a:p>
-            <a:pPr marL="0" indent="0">
-              <a:buNone/>
-            </a:pPr>
-            <a:endParaRPr lang="en-US" sz="1800" dirty="0"/>
-          </a:p>
-          <a:p>
-            <a:pPr marL="0" indent="0">
-              <a:buNone/>
-            </a:pPr>
-            <a:r>
-              <a:rPr lang="en-US" sz="1800" dirty="0">
-                <a:solidFill>
-                  <a:srgbClr val="191919"/>
-                </a:solidFill>
-                <a:latin typeface="Times New Roman" pitchFamily="34" charset="0"/>
-                <a:ea typeface="Times New Roman" pitchFamily="34" charset="-122"/>
-                <a:cs typeface="Times New Roman" pitchFamily="34" charset="-120"/>
-              </a:rPr>
-              <a:t>Unit II (Lectures 10-18): Transparency, Accountability, Surveillance and Privacy - building AI that is trustworthy by design.</a:t>
-            </a:r>
-            <a:endParaRPr lang="en-US" sz="1800" dirty="0"/>
-          </a:p>
-          <a:p>
-            <a:pPr marL="0" indent="0">
-              <a:buNone/>
-            </a:pPr>
-            <a:endParaRPr lang="en-US" sz="1800" dirty="0"/>
-          </a:p>
-          <a:p>
-            <a:pPr marL="0" indent="0">
-              <a:buNone/>
-            </a:pPr>
-            <a:r>
-              <a:rPr lang="en-US" sz="1800" dirty="0">
-                <a:solidFill>
-                  <a:srgbClr val="191919"/>
-                </a:solidFill>
-                <a:latin typeface="Times New Roman" pitchFamily="34" charset="0"/>
-                <a:ea typeface="Times New Roman" pitchFamily="34" charset="-122"/>
-                <a:cs typeface="Times New Roman" pitchFamily="34" charset="-120"/>
-              </a:rPr>
-              <a:t>Lecture 10 (Today): Principles of Responsible AI and the trustworthy AI lifecycle - the framework for everything ahead in this unit.</a:t>
-            </a:r>
-            <a:endParaRPr lang="en-US" sz="1800" dirty="0"/>
-          </a:p>
-          <a:p>
-            <a:pPr marL="0" indent="0">
-              <a:buNone/>
-            </a:pPr>
-            <a:endParaRPr lang="en-US" sz="1800" dirty="0"/>
-          </a:p>
-          <a:p>
-            <a:pPr marL="0" indent="0">
-              <a:buNone/>
-            </a:pPr>
-            <a:r>
-              <a:rPr lang="en-US" sz="1800" dirty="0">
-                <a:solidFill>
-                  <a:srgbClr val="191919"/>
-                </a:solidFill>
-                <a:latin typeface="Times New Roman" pitchFamily="34" charset="0"/>
-                <a:ea typeface="Times New Roman" pitchFamily="34" charset="-122"/>
-                <a:cs typeface="Times New Roman" pitchFamily="34" charset="-120"/>
-              </a:rPr>
-              <a:t>Lecture 11 (Next): Transparency in AI - meaning, importance and communicating limitations.</a:t>
-            </a:r>
-            <a:endParaRPr lang="en-US" sz="1800" dirty="0"/>
-          </a:p>
-          <a:p>
-            <a:pPr marL="0" indent="0">
-              <a:buNone/>
-            </a:pPr>
-            <a:endParaRPr lang="en-US" sz="1800" dirty="0"/>
-          </a:p>
-          <a:p>
-            <a:pPr marL="0" indent="0">
-              <a:buNone/>
-            </a:pPr>
-            <a:r>
-              <a:rPr lang="en-US" sz="1800" dirty="0">
-                <a:solidFill>
-                  <a:srgbClr val="191919"/>
-                </a:solidFill>
-                <a:latin typeface="Times New Roman" pitchFamily="34" charset="0"/>
-                <a:ea typeface="Times New Roman" pitchFamily="34" charset="-122"/>
-                <a:cs typeface="Times New Roman" pitchFamily="34" charset="-120"/>
-              </a:rPr>
-              <a:t>Later lectures cover transparency tools, accountability frameworks, surveillance, privacy and data protection.</a:t>
-            </a:r>
-            <a:endParaRPr lang="en-US" sz="1800" dirty="0"/>
-          </a:p>
-        </p:txBody>
-      </p:sp>
-      <p:sp>
-        <p:nvSpPr>
-          <p:cNvPr id="8" name="Text 6"/>
-          <p:cNvSpPr/>
-          <p:nvPr/>
-        </p:nvSpPr>
-        <p:spPr>
-          <a:xfrm>
-            <a:off x="502920" y="6382512"/>
-            <a:ext cx="10744200" cy="320040"/>
-          </a:xfrm>
-          <a:prstGeom prst="rect">
-            <a:avLst/>
-          </a:prstGeom>
-          <a:noFill/>
-          <a:ln/>
-        </p:spPr>
-        <p:txBody>
-          <a:bodyPr wrap="square" lIns="0" tIns="0" rIns="0" bIns="0" rtlCol="0" anchor="ctr"/>
-          <a:lstStyle/>
-          <a:p>
-            <a:pPr marL="0" indent="0">
-              <a:buNone/>
-            </a:pPr>
-            <a:r>
-              <a:rPr lang="en-US" sz="1200" i="1" dirty="0">
-                <a:solidFill>
-                  <a:srgbClr val="595959"/>
-                </a:solidFill>
-                <a:latin typeface="Times New Roman" pitchFamily="34" charset="0"/>
-                <a:ea typeface="Times New Roman" pitchFamily="34" charset="-122"/>
-                <a:cs typeface="Times New Roman" pitchFamily="34" charset="-120"/>
-              </a:rPr>
-              <a:t>Teaching cue: Frame this as a bridge lecture - it connects Unit I's fairness focus to Unit II's broader principles.</a:t>
-            </a:r>
-            <a:endParaRPr lang="en-US" sz="1200" dirty="0"/>
-          </a:p>
-        </p:txBody>
-      </p:sp>
-      <p:sp>
-        <p:nvSpPr>
-          <p:cNvPr id="9" name="Text 7"/>
-          <p:cNvSpPr/>
-          <p:nvPr/>
-        </p:nvSpPr>
-        <p:spPr>
-          <a:xfrm>
-            <a:off x="11430000" y="6446520"/>
-            <a:ext cx="365760" cy="182880"/>
-          </a:xfrm>
-          <a:prstGeom prst="rect">
-            <a:avLst/>
-          </a:prstGeom>
-          <a:noFill/>
-          <a:ln/>
-        </p:spPr>
-        <p:txBody>
-          <a:bodyPr wrap="square" lIns="0" tIns="0" rIns="0" bIns="0" rtlCol="0" anchor="ctr"/>
-          <a:lstStyle/>
-          <a:p>
-            <a:pPr marL="0" indent="0" algn="ctr">
-              <a:buNone/>
-            </a:pPr>
-            <a:r>
-              <a:rPr lang="en-US" sz="1200" dirty="0">
-                <a:solidFill>
-                  <a:srgbClr val="595959"/>
-                </a:solidFill>
-                <a:latin typeface="Times New Roman" pitchFamily="34" charset="0"/>
-                <a:ea typeface="Times New Roman" pitchFamily="34" charset="-122"/>
-                <a:cs typeface="Times New Roman" pitchFamily="34" charset="-120"/>
-              </a:rPr>
-              <a:t>2</a:t>
-            </a:r>
-            <a:endParaRPr lang="en-US" sz="1200" dirty="0"/>
-          </a:p>
-        </p:txBody>
-      </p:sp>
-    </p:spTree>
-  </p:cSld>
-  <p:clrMapOvr>
-    <a:masterClrMapping/>
-  </p:clrMapOvr>
-</p:sld>
-</file>
-
-<file path=ppt/slides/slide3.xml><?xml version="1.0" encoding="utf-8"?>
-<p:sld xmlns:a="http://schemas.openxmlformats.org/drawingml/2006/main" xmlns:r="http://schemas.openxmlformats.org/officeDocument/2006/relationships" xmlns:p="http://schemas.openxmlformats.org/presentationml/2006/main">
-  <p:cSld name="Slide 3">
-    <p:bg>
-      <p:bgPr>
-        <a:solidFill>
-          <a:srgbClr val="FFFFFF"/>
-        </a:solidFill>
-        <a:effectLst/>
-      </p:bgPr>
-    </p:bg>
-    <p:spTree>
-      <p:nvGrpSpPr>
-        <p:cNvPr id="1" name=""/>
-        <p:cNvGrpSpPr/>
-        <p:nvPr/>
-      </p:nvGrpSpPr>
-      <p:grpSpPr>
-        <a:xfrm>
-          <a:off x="0" y="0"/>
-          <a:ext cx="0" cy="0"/>
-          <a:chOff x="0" y="0"/>
-          <a:chExt cx="0" cy="0"/>
-        </a:xfrm>
-      </p:grpSpPr>
-      <p:sp>
-        <p:nvSpPr>
-          <p:cNvPr id="2" name="Shape 0"/>
-          <p:cNvSpPr/>
-          <p:nvPr/>
-        </p:nvSpPr>
-        <p:spPr>
-          <a:xfrm>
-            <a:off x="0" y="0"/>
-            <a:ext cx="12191695" cy="502920"/>
-          </a:xfrm>
-          <a:prstGeom prst="rect">
-            <a:avLst/>
-          </a:prstGeom>
-          <a:solidFill>
-            <a:srgbClr val="F8FBFF"/>
-          </a:solidFill>
-          <a:ln w="12700">
-            <a:solidFill>
-              <a:srgbClr val="F8FBFF"/>
-            </a:solidFill>
-            <a:prstDash val="solid"/>
-          </a:ln>
-        </p:spPr>
-        <p:txBody>
-          <a:bodyPr/>
-          <a:lstStyle/>
-          <a:p>
-            <a:endParaRPr lang="en-IN"/>
-          </a:p>
-        </p:txBody>
-      </p:sp>
-      <p:sp>
-        <p:nvSpPr>
-          <p:cNvPr id="3" name="Shape 1"/>
-          <p:cNvSpPr/>
-          <p:nvPr/>
-        </p:nvSpPr>
-        <p:spPr>
-          <a:xfrm>
-            <a:off x="0" y="475488"/>
-            <a:ext cx="12191695" cy="27432"/>
-          </a:xfrm>
-          <a:prstGeom prst="rect">
-            <a:avLst/>
-          </a:prstGeom>
-          <a:solidFill>
-            <a:srgbClr val="2E75B6"/>
-          </a:solidFill>
-          <a:ln w="12700">
-            <a:solidFill>
-              <a:srgbClr val="2E75B6"/>
-            </a:solidFill>
-            <a:prstDash val="solid"/>
-          </a:ln>
-        </p:spPr>
-        <p:txBody>
-          <a:bodyPr/>
-          <a:lstStyle/>
-          <a:p>
-            <a:endParaRPr lang="en-IN"/>
-          </a:p>
-        </p:txBody>
-      </p:sp>
-      <p:sp>
-        <p:nvSpPr>
-          <p:cNvPr id="4" name="Text 2"/>
-          <p:cNvSpPr/>
-          <p:nvPr/>
-        </p:nvSpPr>
-        <p:spPr>
-          <a:xfrm>
-            <a:off x="365760" y="73152"/>
-            <a:ext cx="6400800" cy="274320"/>
-          </a:xfrm>
-          <a:prstGeom prst="rect">
-            <a:avLst/>
-          </a:prstGeom>
-          <a:noFill/>
-          <a:ln/>
-        </p:spPr>
-        <p:txBody>
-          <a:bodyPr wrap="square" lIns="0" tIns="0" rIns="0" bIns="0" rtlCol="0" anchor="ctr"/>
-          <a:lstStyle/>
-          <a:p>
-            <a:pPr marL="0" indent="0">
-              <a:buNone/>
-            </a:pPr>
-            <a:r>
-              <a:rPr lang="en-US" sz="1800" b="1" dirty="0">
-                <a:solidFill>
-                  <a:srgbClr val="1F4E79"/>
-                </a:solidFill>
-                <a:latin typeface="Times New Roman" pitchFamily="34" charset="0"/>
-                <a:ea typeface="Times New Roman" pitchFamily="34" charset="-122"/>
-                <a:cs typeface="Times New Roman" pitchFamily="34" charset="-120"/>
-              </a:rPr>
-              <a:t>TCS349: Responsible and Explainable AI</a:t>
-            </a:r>
-            <a:endParaRPr lang="en-US" sz="1800" dirty="0"/>
-          </a:p>
-        </p:txBody>
-      </p:sp>
-      <p:sp>
-        <p:nvSpPr>
-          <p:cNvPr id="5" name="Text 3"/>
-          <p:cNvSpPr/>
-          <p:nvPr/>
-        </p:nvSpPr>
-        <p:spPr>
-          <a:xfrm>
-            <a:off x="8321040" y="82296"/>
-            <a:ext cx="3383280" cy="274320"/>
-          </a:xfrm>
-          <a:prstGeom prst="rect">
-            <a:avLst/>
-          </a:prstGeom>
-          <a:noFill/>
-          <a:ln/>
-        </p:spPr>
-        <p:txBody>
-          <a:bodyPr wrap="square" lIns="0" tIns="0" rIns="0" bIns="0" rtlCol="0" anchor="ctr"/>
-          <a:lstStyle/>
-          <a:p>
-            <a:pPr marL="0" indent="0" algn="r">
-              <a:buNone/>
-            </a:pPr>
-            <a:r>
-              <a:rPr lang="en-US" sz="1600" b="1" dirty="0">
-                <a:solidFill>
-                  <a:srgbClr val="1F4E79"/>
-                </a:solidFill>
-                <a:latin typeface="Times New Roman" pitchFamily="34" charset="0"/>
-                <a:ea typeface="Times New Roman" pitchFamily="34" charset="-122"/>
-                <a:cs typeface="Times New Roman" pitchFamily="34" charset="-120"/>
-              </a:rPr>
-              <a:t>Unit 2 | Lecture 1</a:t>
-            </a:r>
-            <a:endParaRPr lang="en-US" sz="1600" dirty="0"/>
-          </a:p>
-        </p:txBody>
-      </p:sp>
-      <p:sp>
-        <p:nvSpPr>
-          <p:cNvPr id="6" name="Text 4"/>
-          <p:cNvSpPr/>
-          <p:nvPr/>
-        </p:nvSpPr>
-        <p:spPr>
-          <a:xfrm>
-            <a:off x="502920" y="640080"/>
-            <a:ext cx="11155680" cy="640080"/>
-          </a:xfrm>
-          <a:prstGeom prst="rect">
-            <a:avLst/>
-          </a:prstGeom>
-          <a:noFill/>
-          <a:ln/>
-        </p:spPr>
-        <p:txBody>
-          <a:bodyPr wrap="square" lIns="0" tIns="0" rIns="0" bIns="0" rtlCol="0" anchor="ctr"/>
-          <a:lstStyle/>
-          <a:p>
-            <a:pPr marL="0" indent="0">
-              <a:buNone/>
-            </a:pPr>
-            <a:r>
-              <a:rPr lang="en-US" sz="2300" b="1" dirty="0">
-                <a:solidFill>
-                  <a:srgbClr val="1F4E79"/>
-                </a:solidFill>
-                <a:latin typeface="Times New Roman" pitchFamily="34" charset="0"/>
-                <a:ea typeface="Times New Roman" pitchFamily="34" charset="-122"/>
-                <a:cs typeface="Times New Roman" pitchFamily="34" charset="-120"/>
-              </a:rPr>
-              <a:t>Lecture Outcomes</a:t>
-            </a:r>
-            <a:endParaRPr lang="en-US" sz="2300" dirty="0"/>
-          </a:p>
-        </p:txBody>
-      </p:sp>
-      <p:sp>
-        <p:nvSpPr>
-          <p:cNvPr id="7" name="Text 5"/>
-          <p:cNvSpPr/>
-          <p:nvPr/>
-        </p:nvSpPr>
-        <p:spPr>
-          <a:xfrm>
-            <a:off x="594360" y="1417320"/>
-            <a:ext cx="10972800" cy="4434840"/>
-          </a:xfrm>
-          <a:prstGeom prst="rect">
-            <a:avLst/>
-          </a:prstGeom>
-          <a:noFill/>
-          <a:ln/>
-        </p:spPr>
-        <p:txBody>
-          <a:bodyPr wrap="square" lIns="50800" tIns="50800" rIns="50800" bIns="50800" rtlCol="0" anchor="t"/>
-          <a:lstStyle/>
-          <a:p>
-            <a:pPr marL="0" indent="0">
-              <a:buNone/>
-            </a:pPr>
-            <a:r>
-              <a:rPr lang="en-US" sz="1800" dirty="0">
-                <a:solidFill>
-                  <a:srgbClr val="191919"/>
-                </a:solidFill>
-                <a:latin typeface="Times New Roman" pitchFamily="34" charset="0"/>
-                <a:ea typeface="Times New Roman" pitchFamily="34" charset="-122"/>
-                <a:cs typeface="Times New Roman" pitchFamily="34" charset="-120"/>
-              </a:rPr>
-              <a:t>Define Responsible AI and list its core guiding principles.</a:t>
-            </a:r>
-            <a:endParaRPr lang="en-US" sz="1800" dirty="0"/>
-          </a:p>
-          <a:p>
-            <a:pPr marL="0" indent="0">
-              <a:buNone/>
-            </a:pPr>
-            <a:endParaRPr lang="en-US" sz="1800" dirty="0"/>
-          </a:p>
-          <a:p>
-            <a:pPr marL="0" indent="0">
-              <a:buNone/>
-            </a:pPr>
-            <a:r>
-              <a:rPr lang="en-US" sz="1800" dirty="0">
-                <a:solidFill>
-                  <a:srgbClr val="191919"/>
-                </a:solidFill>
-                <a:latin typeface="Times New Roman" pitchFamily="34" charset="0"/>
-                <a:ea typeface="Times New Roman" pitchFamily="34" charset="-122"/>
-                <a:cs typeface="Times New Roman" pitchFamily="34" charset="-120"/>
-              </a:rPr>
-              <a:t>Explain why fairness alone is not sufficient for a trustworthy AI system.</a:t>
-            </a:r>
-            <a:endParaRPr lang="en-US" sz="1800" dirty="0"/>
-          </a:p>
-          <a:p>
-            <a:pPr marL="0" indent="0">
-              <a:buNone/>
-            </a:pPr>
-            <a:endParaRPr lang="en-US" sz="1800" dirty="0"/>
-          </a:p>
-          <a:p>
-            <a:pPr marL="0" indent="0">
-              <a:buNone/>
-            </a:pPr>
-            <a:r>
-              <a:rPr lang="en-US" sz="1800" dirty="0">
-                <a:solidFill>
-                  <a:srgbClr val="191919"/>
-                </a:solidFill>
-                <a:latin typeface="Times New Roman" pitchFamily="34" charset="0"/>
-                <a:ea typeface="Times New Roman" pitchFamily="34" charset="-122"/>
-                <a:cs typeface="Times New Roman" pitchFamily="34" charset="-120"/>
-              </a:rPr>
-              <a:t>Describe the concept of a trustworthy AI lifecycle and its major stages.</a:t>
-            </a:r>
-            <a:endParaRPr lang="en-US" sz="1800" dirty="0"/>
-          </a:p>
-          <a:p>
-            <a:pPr marL="0" indent="0">
-              <a:buNone/>
-            </a:pPr>
-            <a:endParaRPr lang="en-US" sz="1800" dirty="0"/>
-          </a:p>
-          <a:p>
-            <a:pPr marL="0" indent="0">
-              <a:buNone/>
-            </a:pPr>
-            <a:r>
-              <a:rPr lang="en-US" sz="1800" dirty="0">
-                <a:solidFill>
-                  <a:srgbClr val="191919"/>
-                </a:solidFill>
-                <a:latin typeface="Times New Roman" pitchFamily="34" charset="0"/>
-                <a:ea typeface="Times New Roman" pitchFamily="34" charset="-122"/>
-                <a:cs typeface="Times New Roman" pitchFamily="34" charset="-120"/>
-              </a:rPr>
-              <a:t>Identify where responsible-AI practices apply at each stage of a system's life.</a:t>
-            </a:r>
-            <a:endParaRPr lang="en-US" sz="1800" dirty="0"/>
-          </a:p>
-        </p:txBody>
-      </p:sp>
-      <p:sp>
-        <p:nvSpPr>
-          <p:cNvPr id="8" name="Text 6"/>
-          <p:cNvSpPr/>
-          <p:nvPr/>
-        </p:nvSpPr>
-        <p:spPr>
-          <a:xfrm>
-            <a:off x="502920" y="6382512"/>
-            <a:ext cx="10744200" cy="320040"/>
-          </a:xfrm>
-          <a:prstGeom prst="rect">
-            <a:avLst/>
-          </a:prstGeom>
-          <a:noFill/>
-          <a:ln/>
-        </p:spPr>
-        <p:txBody>
-          <a:bodyPr wrap="square" lIns="0" tIns="0" rIns="0" bIns="0" rtlCol="0" anchor="ctr"/>
-          <a:lstStyle/>
-          <a:p>
-            <a:pPr marL="0" indent="0">
-              <a:buNone/>
-            </a:pPr>
-            <a:r>
-              <a:rPr lang="en-US" sz="1200" i="1" dirty="0">
-                <a:solidFill>
-                  <a:srgbClr val="595959"/>
-                </a:solidFill>
-                <a:latin typeface="Times New Roman" pitchFamily="34" charset="0"/>
-                <a:ea typeface="Times New Roman" pitchFamily="34" charset="-122"/>
-                <a:cs typeface="Times New Roman" pitchFamily="34" charset="-120"/>
-              </a:rPr>
-              <a:t>Teaching cue: Tell students this lecture is largely conceptual - it sets up vocabulary used for the rest of Unit II.</a:t>
-            </a:r>
-            <a:endParaRPr lang="en-US" sz="1200" dirty="0"/>
-          </a:p>
-        </p:txBody>
-      </p:sp>
-      <p:sp>
-        <p:nvSpPr>
-          <p:cNvPr id="9" name="Text 7"/>
-          <p:cNvSpPr/>
-          <p:nvPr/>
-        </p:nvSpPr>
-        <p:spPr>
-          <a:xfrm>
-            <a:off x="11430000" y="6446520"/>
-            <a:ext cx="365760" cy="182880"/>
-          </a:xfrm>
-          <a:prstGeom prst="rect">
-            <a:avLst/>
-          </a:prstGeom>
-          <a:noFill/>
-          <a:ln/>
-        </p:spPr>
-        <p:txBody>
-          <a:bodyPr wrap="square" lIns="0" tIns="0" rIns="0" bIns="0" rtlCol="0" anchor="ctr"/>
-          <a:lstStyle/>
-          <a:p>
-            <a:pPr marL="0" indent="0" algn="ctr">
-              <a:buNone/>
-            </a:pPr>
-            <a:r>
-              <a:rPr lang="en-US" sz="1200" dirty="0">
-                <a:solidFill>
-                  <a:srgbClr val="595959"/>
-                </a:solidFill>
-                <a:latin typeface="Times New Roman" pitchFamily="34" charset="0"/>
-                <a:ea typeface="Times New Roman" pitchFamily="34" charset="-122"/>
-                <a:cs typeface="Times New Roman" pitchFamily="34" charset="-120"/>
-              </a:rPr>
-              <a:t>3</a:t>
-            </a:r>
-            <a:endParaRPr lang="en-US" sz="1200" dirty="0"/>
-          </a:p>
-        </p:txBody>
-      </p:sp>
-    </p:spTree>
-  </p:cSld>
-  <p:clrMapOvr>
-    <a:masterClrMapping/>
-  </p:clrMapOvr>
-</p:sld>
-</file>
-
-<file path=ppt/slides/slide4.xml><?xml version="1.0" encoding="utf-8"?>
 <p:sld xmlns:a="http://schemas.openxmlformats.org/drawingml/2006/main" xmlns:r="http://schemas.openxmlformats.org/officeDocument/2006/relationships" xmlns:p="http://schemas.openxmlformats.org/presentationml/2006/main">
   <p:cSld name="Slide 4">
     <p:bg>
@@ -7785,7 +4976,7 @@
 </p:sld>
 </file>
 
-<file path=ppt/slides/slide5.xml><?xml version="1.0" encoding="utf-8"?>
+<file path=ppt/slides/slide3.xml><?xml version="1.0" encoding="utf-8"?>
 <p:sld xmlns:a="http://schemas.openxmlformats.org/drawingml/2006/main" xmlns:r="http://schemas.openxmlformats.org/officeDocument/2006/relationships" xmlns:p="http://schemas.openxmlformats.org/presentationml/2006/main">
   <p:cSld name="Slide 5">
     <p:bg>
@@ -8185,7 +5376,7 @@
 </p:sld>
 </file>
 
-<file path=ppt/slides/slide6.xml><?xml version="1.0" encoding="utf-8"?>
+<file path=ppt/slides/slide4.xml><?xml version="1.0" encoding="utf-8"?>
 <p:sld xmlns:a="http://schemas.openxmlformats.org/drawingml/2006/main" xmlns:r="http://schemas.openxmlformats.org/officeDocument/2006/relationships" xmlns:p="http://schemas.openxmlformats.org/presentationml/2006/main">
   <p:cSld name="Slide 6">
     <p:bg>
@@ -9482,7 +6673,7 @@
 </p:sld>
 </file>
 
-<file path=ppt/slides/slide7.xml><?xml version="1.0" encoding="utf-8"?>
+<file path=ppt/slides/slide5.xml><?xml version="1.0" encoding="utf-8"?>
 <p:sld xmlns:a="http://schemas.openxmlformats.org/drawingml/2006/main" xmlns:r="http://schemas.openxmlformats.org/officeDocument/2006/relationships" xmlns:p="http://schemas.openxmlformats.org/presentationml/2006/main">
   <p:cSld name="Slide 7">
     <p:bg>
@@ -9882,7 +7073,7 @@
 </p:sld>
 </file>
 
-<file path=ppt/slides/slide8.xml><?xml version="1.0" encoding="utf-8"?>
+<file path=ppt/slides/slide6.xml><?xml version="1.0" encoding="utf-8"?>
 <p:sld xmlns:a="http://schemas.openxmlformats.org/drawingml/2006/main" xmlns:r="http://schemas.openxmlformats.org/officeDocument/2006/relationships" xmlns:p="http://schemas.openxmlformats.org/presentationml/2006/main">
   <p:cSld name="Slide 8">
     <p:bg>
@@ -10282,7 +7473,7 @@
 </p:sld>
 </file>
 
-<file path=ppt/slides/slide9.xml><?xml version="1.0" encoding="utf-8"?>
+<file path=ppt/slides/slide7.xml><?xml version="1.0" encoding="utf-8"?>
 <p:sld xmlns:a="http://schemas.openxmlformats.org/drawingml/2006/main" xmlns:r="http://schemas.openxmlformats.org/officeDocument/2006/relationships" xmlns:p="http://schemas.openxmlformats.org/presentationml/2006/main">
   <p:cSld name="Slide 9">
     <p:bg>
@@ -10669,6 +7860,806 @@
                 <a:cs typeface="Times New Roman" pitchFamily="34" charset="-120"/>
               </a:rPr>
               <a:t>9</a:t>
+            </a:r>
+            <a:endParaRPr lang="en-US" sz="1200" dirty="0"/>
+          </a:p>
+        </p:txBody>
+      </p:sp>
+    </p:spTree>
+  </p:cSld>
+  <p:clrMapOvr>
+    <a:masterClrMapping/>
+  </p:clrMapOvr>
+</p:sld>
+</file>
+
+<file path=ppt/slides/slide8.xml><?xml version="1.0" encoding="utf-8"?>
+<p:sld xmlns:a="http://schemas.openxmlformats.org/drawingml/2006/main" xmlns:r="http://schemas.openxmlformats.org/officeDocument/2006/relationships" xmlns:p="http://schemas.openxmlformats.org/presentationml/2006/main">
+  <p:cSld name="Slide 10">
+    <p:bg>
+      <p:bgPr>
+        <a:solidFill>
+          <a:srgbClr val="FFFFFF"/>
+        </a:solidFill>
+        <a:effectLst/>
+      </p:bgPr>
+    </p:bg>
+    <p:spTree>
+      <p:nvGrpSpPr>
+        <p:cNvPr id="1" name=""/>
+        <p:cNvGrpSpPr/>
+        <p:nvPr/>
+      </p:nvGrpSpPr>
+      <p:grpSpPr>
+        <a:xfrm>
+          <a:off x="0" y="0"/>
+          <a:ext cx="0" cy="0"/>
+          <a:chOff x="0" y="0"/>
+          <a:chExt cx="0" cy="0"/>
+        </a:xfrm>
+      </p:grpSpPr>
+      <p:sp>
+        <p:nvSpPr>
+          <p:cNvPr id="2" name="Shape 0"/>
+          <p:cNvSpPr/>
+          <p:nvPr/>
+        </p:nvSpPr>
+        <p:spPr>
+          <a:xfrm>
+            <a:off x="0" y="0"/>
+            <a:ext cx="12191695" cy="502920"/>
+          </a:xfrm>
+          <a:prstGeom prst="rect">
+            <a:avLst/>
+          </a:prstGeom>
+          <a:solidFill>
+            <a:srgbClr val="F8FBFF"/>
+          </a:solidFill>
+          <a:ln w="12700">
+            <a:solidFill>
+              <a:srgbClr val="F8FBFF"/>
+            </a:solidFill>
+            <a:prstDash val="solid"/>
+          </a:ln>
+        </p:spPr>
+        <p:txBody>
+          <a:bodyPr/>
+          <a:lstStyle/>
+          <a:p>
+            <a:endParaRPr lang="en-IN"/>
+          </a:p>
+        </p:txBody>
+      </p:sp>
+      <p:sp>
+        <p:nvSpPr>
+          <p:cNvPr id="3" name="Shape 1"/>
+          <p:cNvSpPr/>
+          <p:nvPr/>
+        </p:nvSpPr>
+        <p:spPr>
+          <a:xfrm>
+            <a:off x="0" y="475488"/>
+            <a:ext cx="12191695" cy="27432"/>
+          </a:xfrm>
+          <a:prstGeom prst="rect">
+            <a:avLst/>
+          </a:prstGeom>
+          <a:solidFill>
+            <a:srgbClr val="2E75B6"/>
+          </a:solidFill>
+          <a:ln w="12700">
+            <a:solidFill>
+              <a:srgbClr val="2E75B6"/>
+            </a:solidFill>
+            <a:prstDash val="solid"/>
+          </a:ln>
+        </p:spPr>
+        <p:txBody>
+          <a:bodyPr/>
+          <a:lstStyle/>
+          <a:p>
+            <a:endParaRPr lang="en-IN"/>
+          </a:p>
+        </p:txBody>
+      </p:sp>
+      <p:sp>
+        <p:nvSpPr>
+          <p:cNvPr id="4" name="Text 2"/>
+          <p:cNvSpPr/>
+          <p:nvPr/>
+        </p:nvSpPr>
+        <p:spPr>
+          <a:xfrm>
+            <a:off x="365760" y="73152"/>
+            <a:ext cx="6400800" cy="274320"/>
+          </a:xfrm>
+          <a:prstGeom prst="rect">
+            <a:avLst/>
+          </a:prstGeom>
+          <a:noFill/>
+          <a:ln/>
+        </p:spPr>
+        <p:txBody>
+          <a:bodyPr wrap="square" lIns="0" tIns="0" rIns="0" bIns="0" rtlCol="0" anchor="ctr"/>
+          <a:lstStyle/>
+          <a:p>
+            <a:pPr marL="0" indent="0">
+              <a:buNone/>
+            </a:pPr>
+            <a:r>
+              <a:rPr lang="en-US" sz="1800" b="1" dirty="0">
+                <a:solidFill>
+                  <a:srgbClr val="1F4E79"/>
+                </a:solidFill>
+                <a:latin typeface="Times New Roman" pitchFamily="34" charset="0"/>
+                <a:ea typeface="Times New Roman" pitchFamily="34" charset="-122"/>
+                <a:cs typeface="Times New Roman" pitchFamily="34" charset="-120"/>
+              </a:rPr>
+              <a:t>TCS349: Responsible and Explainable AI</a:t>
+            </a:r>
+            <a:endParaRPr lang="en-US" sz="1800" dirty="0"/>
+          </a:p>
+        </p:txBody>
+      </p:sp>
+      <p:sp>
+        <p:nvSpPr>
+          <p:cNvPr id="5" name="Text 3"/>
+          <p:cNvSpPr/>
+          <p:nvPr/>
+        </p:nvSpPr>
+        <p:spPr>
+          <a:xfrm>
+            <a:off x="8321040" y="82296"/>
+            <a:ext cx="3383280" cy="274320"/>
+          </a:xfrm>
+          <a:prstGeom prst="rect">
+            <a:avLst/>
+          </a:prstGeom>
+          <a:noFill/>
+          <a:ln/>
+        </p:spPr>
+        <p:txBody>
+          <a:bodyPr wrap="square" lIns="0" tIns="0" rIns="0" bIns="0" rtlCol="0" anchor="ctr"/>
+          <a:lstStyle/>
+          <a:p>
+            <a:pPr marL="0" indent="0" algn="r">
+              <a:buNone/>
+            </a:pPr>
+            <a:r>
+              <a:rPr lang="en-US" sz="1600" b="1" dirty="0">
+                <a:solidFill>
+                  <a:srgbClr val="1F4E79"/>
+                </a:solidFill>
+                <a:latin typeface="Times New Roman" pitchFamily="34" charset="0"/>
+                <a:ea typeface="Times New Roman" pitchFamily="34" charset="-122"/>
+                <a:cs typeface="Times New Roman" pitchFamily="34" charset="-120"/>
+              </a:rPr>
+              <a:t>Unit 2 | Lecture 1</a:t>
+            </a:r>
+            <a:endParaRPr lang="en-US" sz="1600" dirty="0"/>
+          </a:p>
+        </p:txBody>
+      </p:sp>
+      <p:sp>
+        <p:nvSpPr>
+          <p:cNvPr id="6" name="Text 4"/>
+          <p:cNvSpPr/>
+          <p:nvPr/>
+        </p:nvSpPr>
+        <p:spPr>
+          <a:xfrm>
+            <a:off x="502920" y="640080"/>
+            <a:ext cx="11155680" cy="640080"/>
+          </a:xfrm>
+          <a:prstGeom prst="rect">
+            <a:avLst/>
+          </a:prstGeom>
+          <a:noFill/>
+          <a:ln/>
+        </p:spPr>
+        <p:txBody>
+          <a:bodyPr wrap="square" lIns="0" tIns="0" rIns="0" bIns="0" rtlCol="0" anchor="ctr"/>
+          <a:lstStyle/>
+          <a:p>
+            <a:pPr marL="0" indent="0">
+              <a:buNone/>
+            </a:pPr>
+            <a:r>
+              <a:rPr lang="en-US" sz="2300" b="1" dirty="0">
+                <a:solidFill>
+                  <a:srgbClr val="1F4E79"/>
+                </a:solidFill>
+                <a:latin typeface="Times New Roman" pitchFamily="34" charset="0"/>
+                <a:ea typeface="Times New Roman" pitchFamily="34" charset="-122"/>
+                <a:cs typeface="Times New Roman" pitchFamily="34" charset="-120"/>
+              </a:rPr>
+              <a:t>7. Principle: Privacy &amp; Data Governance</a:t>
+            </a:r>
+            <a:endParaRPr lang="en-US" sz="2300" dirty="0"/>
+          </a:p>
+        </p:txBody>
+      </p:sp>
+      <p:sp>
+        <p:nvSpPr>
+          <p:cNvPr id="7" name="Text 5"/>
+          <p:cNvSpPr/>
+          <p:nvPr/>
+        </p:nvSpPr>
+        <p:spPr>
+          <a:xfrm>
+            <a:off x="594360" y="1417320"/>
+            <a:ext cx="10972800" cy="4434840"/>
+          </a:xfrm>
+          <a:prstGeom prst="rect">
+            <a:avLst/>
+          </a:prstGeom>
+          <a:noFill/>
+          <a:ln/>
+        </p:spPr>
+        <p:txBody>
+          <a:bodyPr wrap="square" lIns="50800" tIns="50800" rIns="50800" bIns="50800" rtlCol="0" anchor="t"/>
+          <a:lstStyle/>
+          <a:p>
+            <a:pPr marL="0" indent="0">
+              <a:buNone/>
+            </a:pPr>
+            <a:r>
+              <a:rPr lang="en-US" sz="1800" dirty="0">
+                <a:solidFill>
+                  <a:srgbClr val="191919"/>
+                </a:solidFill>
+                <a:latin typeface="Times New Roman" pitchFamily="34" charset="0"/>
+                <a:ea typeface="Times New Roman" pitchFamily="34" charset="-122"/>
+                <a:cs typeface="Times New Roman" pitchFamily="34" charset="-120"/>
+              </a:rPr>
+              <a:t>Ensures personal and sensitive data used by an AI system is collected, stored and processed lawfully and respectfully.</a:t>
+            </a:r>
+            <a:endParaRPr lang="en-US" sz="1800" dirty="0"/>
+          </a:p>
+          <a:p>
+            <a:pPr marL="0" indent="0">
+              <a:buNone/>
+            </a:pPr>
+            <a:endParaRPr lang="en-US" sz="1800" dirty="0"/>
+          </a:p>
+          <a:p>
+            <a:pPr marL="0" indent="0">
+              <a:buNone/>
+            </a:pPr>
+            <a:r>
+              <a:rPr lang="en-US" sz="1800" dirty="0">
+                <a:solidFill>
+                  <a:srgbClr val="191919"/>
+                </a:solidFill>
+                <a:latin typeface="Times New Roman" pitchFamily="34" charset="0"/>
+                <a:ea typeface="Times New Roman" pitchFamily="34" charset="-122"/>
+                <a:cs typeface="Times New Roman" pitchFamily="34" charset="-120"/>
+              </a:rPr>
+              <a:t>Covers informed consent, data minimisation, purpose limitation and protection against misuse.</a:t>
+            </a:r>
+            <a:endParaRPr lang="en-US" sz="1800" dirty="0"/>
+          </a:p>
+          <a:p>
+            <a:pPr marL="0" indent="0">
+              <a:buNone/>
+            </a:pPr>
+            <a:endParaRPr lang="en-US" sz="1800" dirty="0"/>
+          </a:p>
+          <a:p>
+            <a:pPr marL="0" indent="0">
+              <a:buNone/>
+            </a:pPr>
+            <a:r>
+              <a:rPr lang="en-US" sz="1800" dirty="0">
+                <a:solidFill>
+                  <a:srgbClr val="191919"/>
+                </a:solidFill>
+                <a:latin typeface="Times New Roman" pitchFamily="34" charset="0"/>
+                <a:ea typeface="Times New Roman" pitchFamily="34" charset="-122"/>
+                <a:cs typeface="Times New Roman" pitchFamily="34" charset="-120"/>
+              </a:rPr>
+              <a:t>Especially critical for AI used in surveillance, healthcare and finance.</a:t>
+            </a:r>
+            <a:endParaRPr lang="en-US" sz="1800" dirty="0"/>
+          </a:p>
+          <a:p>
+            <a:pPr marL="0" indent="0">
+              <a:buNone/>
+            </a:pPr>
+            <a:endParaRPr lang="en-US" sz="1800" dirty="0"/>
+          </a:p>
+          <a:p>
+            <a:pPr marL="0" indent="0">
+              <a:buNone/>
+            </a:pPr>
+            <a:r>
+              <a:rPr lang="en-US" sz="1800" dirty="0">
+                <a:solidFill>
+                  <a:srgbClr val="191919"/>
+                </a:solidFill>
+                <a:latin typeface="Times New Roman" pitchFamily="34" charset="0"/>
+                <a:ea typeface="Times New Roman" pitchFamily="34" charset="-122"/>
+                <a:cs typeface="Times New Roman" pitchFamily="34" charset="-120"/>
+              </a:rPr>
+              <a:t>Covered in depth in Lectures 16-17 on privacy concerns and data-protection principles.</a:t>
+            </a:r>
+            <a:endParaRPr lang="en-US" sz="1800" dirty="0"/>
+          </a:p>
+        </p:txBody>
+      </p:sp>
+      <p:sp>
+        <p:nvSpPr>
+          <p:cNvPr id="8" name="Text 6"/>
+          <p:cNvSpPr/>
+          <p:nvPr/>
+        </p:nvSpPr>
+        <p:spPr>
+          <a:xfrm>
+            <a:off x="502920" y="6382512"/>
+            <a:ext cx="10744200" cy="320040"/>
+          </a:xfrm>
+          <a:prstGeom prst="rect">
+            <a:avLst/>
+          </a:prstGeom>
+          <a:noFill/>
+          <a:ln/>
+        </p:spPr>
+        <p:txBody>
+          <a:bodyPr wrap="square" lIns="0" tIns="0" rIns="0" bIns="0" rtlCol="0" anchor="ctr"/>
+          <a:lstStyle/>
+          <a:p>
+            <a:pPr marL="0" indent="0">
+              <a:buNone/>
+            </a:pPr>
+            <a:r>
+              <a:rPr lang="en-US" sz="1200" i="1" dirty="0">
+                <a:solidFill>
+                  <a:srgbClr val="595959"/>
+                </a:solidFill>
+                <a:latin typeface="Times New Roman" pitchFamily="34" charset="0"/>
+                <a:ea typeface="Times New Roman" pitchFamily="34" charset="-122"/>
+                <a:cs typeface="Times New Roman" pitchFamily="34" charset="-120"/>
+              </a:rPr>
+              <a:t>Teaching cue: A short preview is enough here - the full treatment comes in Week 6.</a:t>
+            </a:r>
+            <a:endParaRPr lang="en-US" sz="1200" dirty="0"/>
+          </a:p>
+        </p:txBody>
+      </p:sp>
+      <p:sp>
+        <p:nvSpPr>
+          <p:cNvPr id="9" name="Text 7"/>
+          <p:cNvSpPr/>
+          <p:nvPr/>
+        </p:nvSpPr>
+        <p:spPr>
+          <a:xfrm>
+            <a:off x="11430000" y="6446520"/>
+            <a:ext cx="365760" cy="182880"/>
+          </a:xfrm>
+          <a:prstGeom prst="rect">
+            <a:avLst/>
+          </a:prstGeom>
+          <a:noFill/>
+          <a:ln/>
+        </p:spPr>
+        <p:txBody>
+          <a:bodyPr wrap="square" lIns="0" tIns="0" rIns="0" bIns="0" rtlCol="0" anchor="ctr"/>
+          <a:lstStyle/>
+          <a:p>
+            <a:pPr marL="0" indent="0" algn="ctr">
+              <a:buNone/>
+            </a:pPr>
+            <a:r>
+              <a:rPr lang="en-US" sz="1200" dirty="0">
+                <a:solidFill>
+                  <a:srgbClr val="595959"/>
+                </a:solidFill>
+                <a:latin typeface="Times New Roman" pitchFamily="34" charset="0"/>
+                <a:ea typeface="Times New Roman" pitchFamily="34" charset="-122"/>
+                <a:cs typeface="Times New Roman" pitchFamily="34" charset="-120"/>
+              </a:rPr>
+              <a:t>10</a:t>
+            </a:r>
+            <a:endParaRPr lang="en-US" sz="1200" dirty="0"/>
+          </a:p>
+        </p:txBody>
+      </p:sp>
+    </p:spTree>
+  </p:cSld>
+  <p:clrMapOvr>
+    <a:masterClrMapping/>
+  </p:clrMapOvr>
+</p:sld>
+</file>
+
+<file path=ppt/slides/slide9.xml><?xml version="1.0" encoding="utf-8"?>
+<p:sld xmlns:a="http://schemas.openxmlformats.org/drawingml/2006/main" xmlns:r="http://schemas.openxmlformats.org/officeDocument/2006/relationships" xmlns:p="http://schemas.openxmlformats.org/presentationml/2006/main">
+  <p:cSld name="Slide 11">
+    <p:bg>
+      <p:bgPr>
+        <a:solidFill>
+          <a:srgbClr val="FFFFFF"/>
+        </a:solidFill>
+        <a:effectLst/>
+      </p:bgPr>
+    </p:bg>
+    <p:spTree>
+      <p:nvGrpSpPr>
+        <p:cNvPr id="1" name=""/>
+        <p:cNvGrpSpPr/>
+        <p:nvPr/>
+      </p:nvGrpSpPr>
+      <p:grpSpPr>
+        <a:xfrm>
+          <a:off x="0" y="0"/>
+          <a:ext cx="0" cy="0"/>
+          <a:chOff x="0" y="0"/>
+          <a:chExt cx="0" cy="0"/>
+        </a:xfrm>
+      </p:grpSpPr>
+      <p:sp>
+        <p:nvSpPr>
+          <p:cNvPr id="2" name="Shape 0"/>
+          <p:cNvSpPr/>
+          <p:nvPr/>
+        </p:nvSpPr>
+        <p:spPr>
+          <a:xfrm>
+            <a:off x="0" y="0"/>
+            <a:ext cx="12191695" cy="502920"/>
+          </a:xfrm>
+          <a:prstGeom prst="rect">
+            <a:avLst/>
+          </a:prstGeom>
+          <a:solidFill>
+            <a:srgbClr val="F8FBFF"/>
+          </a:solidFill>
+          <a:ln w="12700">
+            <a:solidFill>
+              <a:srgbClr val="F8FBFF"/>
+            </a:solidFill>
+            <a:prstDash val="solid"/>
+          </a:ln>
+        </p:spPr>
+        <p:txBody>
+          <a:bodyPr/>
+          <a:lstStyle/>
+          <a:p>
+            <a:endParaRPr lang="en-IN"/>
+          </a:p>
+        </p:txBody>
+      </p:sp>
+      <p:sp>
+        <p:nvSpPr>
+          <p:cNvPr id="3" name="Shape 1"/>
+          <p:cNvSpPr/>
+          <p:nvPr/>
+        </p:nvSpPr>
+        <p:spPr>
+          <a:xfrm>
+            <a:off x="0" y="475488"/>
+            <a:ext cx="12191695" cy="27432"/>
+          </a:xfrm>
+          <a:prstGeom prst="rect">
+            <a:avLst/>
+          </a:prstGeom>
+          <a:solidFill>
+            <a:srgbClr val="2E75B6"/>
+          </a:solidFill>
+          <a:ln w="12700">
+            <a:solidFill>
+              <a:srgbClr val="2E75B6"/>
+            </a:solidFill>
+            <a:prstDash val="solid"/>
+          </a:ln>
+        </p:spPr>
+        <p:txBody>
+          <a:bodyPr/>
+          <a:lstStyle/>
+          <a:p>
+            <a:endParaRPr lang="en-IN"/>
+          </a:p>
+        </p:txBody>
+      </p:sp>
+      <p:sp>
+        <p:nvSpPr>
+          <p:cNvPr id="4" name="Text 2"/>
+          <p:cNvSpPr/>
+          <p:nvPr/>
+        </p:nvSpPr>
+        <p:spPr>
+          <a:xfrm>
+            <a:off x="365760" y="73152"/>
+            <a:ext cx="6400800" cy="274320"/>
+          </a:xfrm>
+          <a:prstGeom prst="rect">
+            <a:avLst/>
+          </a:prstGeom>
+          <a:noFill/>
+          <a:ln/>
+        </p:spPr>
+        <p:txBody>
+          <a:bodyPr wrap="square" lIns="0" tIns="0" rIns="0" bIns="0" rtlCol="0" anchor="ctr"/>
+          <a:lstStyle/>
+          <a:p>
+            <a:pPr marL="0" indent="0">
+              <a:buNone/>
+            </a:pPr>
+            <a:r>
+              <a:rPr lang="en-US" sz="1800" b="1" dirty="0">
+                <a:solidFill>
+                  <a:srgbClr val="1F4E79"/>
+                </a:solidFill>
+                <a:latin typeface="Times New Roman" pitchFamily="34" charset="0"/>
+                <a:ea typeface="Times New Roman" pitchFamily="34" charset="-122"/>
+                <a:cs typeface="Times New Roman" pitchFamily="34" charset="-120"/>
+              </a:rPr>
+              <a:t>TCS349: Responsible and Explainable AI</a:t>
+            </a:r>
+            <a:endParaRPr lang="en-US" sz="1800" dirty="0"/>
+          </a:p>
+        </p:txBody>
+      </p:sp>
+      <p:sp>
+        <p:nvSpPr>
+          <p:cNvPr id="5" name="Text 3"/>
+          <p:cNvSpPr/>
+          <p:nvPr/>
+        </p:nvSpPr>
+        <p:spPr>
+          <a:xfrm>
+            <a:off x="8321040" y="82296"/>
+            <a:ext cx="3383280" cy="274320"/>
+          </a:xfrm>
+          <a:prstGeom prst="rect">
+            <a:avLst/>
+          </a:prstGeom>
+          <a:noFill/>
+          <a:ln/>
+        </p:spPr>
+        <p:txBody>
+          <a:bodyPr wrap="square" lIns="0" tIns="0" rIns="0" bIns="0" rtlCol="0" anchor="ctr"/>
+          <a:lstStyle/>
+          <a:p>
+            <a:pPr marL="0" indent="0" algn="r">
+              <a:buNone/>
+            </a:pPr>
+            <a:r>
+              <a:rPr lang="en-US" sz="1600" b="1" dirty="0">
+                <a:solidFill>
+                  <a:srgbClr val="1F4E79"/>
+                </a:solidFill>
+                <a:latin typeface="Times New Roman" pitchFamily="34" charset="0"/>
+                <a:ea typeface="Times New Roman" pitchFamily="34" charset="-122"/>
+                <a:cs typeface="Times New Roman" pitchFamily="34" charset="-120"/>
+              </a:rPr>
+              <a:t>Unit 2 | Lecture 1</a:t>
+            </a:r>
+            <a:endParaRPr lang="en-US" sz="1600" dirty="0"/>
+          </a:p>
+        </p:txBody>
+      </p:sp>
+      <p:sp>
+        <p:nvSpPr>
+          <p:cNvPr id="6" name="Text 4"/>
+          <p:cNvSpPr/>
+          <p:nvPr/>
+        </p:nvSpPr>
+        <p:spPr>
+          <a:xfrm>
+            <a:off x="502920" y="640080"/>
+            <a:ext cx="11155680" cy="640080"/>
+          </a:xfrm>
+          <a:prstGeom prst="rect">
+            <a:avLst/>
+          </a:prstGeom>
+          <a:noFill/>
+          <a:ln/>
+        </p:spPr>
+        <p:txBody>
+          <a:bodyPr wrap="square" lIns="0" tIns="0" rIns="0" bIns="0" rtlCol="0" anchor="ctr"/>
+          <a:lstStyle/>
+          <a:p>
+            <a:pPr marL="0" indent="0">
+              <a:buNone/>
+            </a:pPr>
+            <a:r>
+              <a:rPr lang="en-US" sz="2300" b="1" dirty="0">
+                <a:solidFill>
+                  <a:srgbClr val="1F4E79"/>
+                </a:solidFill>
+                <a:latin typeface="Times New Roman" pitchFamily="34" charset="0"/>
+                <a:ea typeface="Times New Roman" pitchFamily="34" charset="-122"/>
+                <a:cs typeface="Times New Roman" pitchFamily="34" charset="-120"/>
+              </a:rPr>
+              <a:t>8. Principle: Safety, Robustness &amp; Reliability</a:t>
+            </a:r>
+            <a:endParaRPr lang="en-US" sz="2300" dirty="0"/>
+          </a:p>
+        </p:txBody>
+      </p:sp>
+      <p:sp>
+        <p:nvSpPr>
+          <p:cNvPr id="7" name="Text 5"/>
+          <p:cNvSpPr/>
+          <p:nvPr/>
+        </p:nvSpPr>
+        <p:spPr>
+          <a:xfrm>
+            <a:off x="594360" y="1417320"/>
+            <a:ext cx="10972800" cy="4434840"/>
+          </a:xfrm>
+          <a:prstGeom prst="rect">
+            <a:avLst/>
+          </a:prstGeom>
+          <a:noFill/>
+          <a:ln/>
+        </p:spPr>
+        <p:txBody>
+          <a:bodyPr wrap="square" lIns="50800" tIns="50800" rIns="50800" bIns="50800" rtlCol="0" anchor="t"/>
+          <a:lstStyle/>
+          <a:p>
+            <a:pPr marL="0" indent="0">
+              <a:buNone/>
+            </a:pPr>
+            <a:r>
+              <a:rPr lang="en-US" sz="1800" dirty="0">
+                <a:solidFill>
+                  <a:srgbClr val="191919"/>
+                </a:solidFill>
+                <a:latin typeface="Times New Roman" pitchFamily="34" charset="0"/>
+                <a:ea typeface="Times New Roman" pitchFamily="34" charset="-122"/>
+                <a:cs typeface="Times New Roman" pitchFamily="34" charset="-120"/>
+              </a:rPr>
+              <a:t>Ensures an AI system performs consistently and safely, including under unexpected or adversarial conditions.</a:t>
+            </a:r>
+            <a:endParaRPr lang="en-US" sz="1800" dirty="0"/>
+          </a:p>
+          <a:p>
+            <a:pPr marL="0" indent="0">
+              <a:buNone/>
+            </a:pPr>
+            <a:endParaRPr lang="en-US" sz="1800" dirty="0"/>
+          </a:p>
+          <a:p>
+            <a:pPr marL="0" indent="0">
+              <a:buNone/>
+            </a:pPr>
+            <a:r>
+              <a:rPr lang="en-US" sz="1800" dirty="0">
+                <a:solidFill>
+                  <a:srgbClr val="191919"/>
+                </a:solidFill>
+                <a:latin typeface="Times New Roman" pitchFamily="34" charset="0"/>
+                <a:ea typeface="Times New Roman" pitchFamily="34" charset="-122"/>
+                <a:cs typeface="Times New Roman" pitchFamily="34" charset="-120"/>
+              </a:rPr>
+              <a:t>Covers testing for edge cases, resistance to manipulation, and graceful failure when the system is uncertain.</a:t>
+            </a:r>
+            <a:endParaRPr lang="en-US" sz="1800" dirty="0"/>
+          </a:p>
+          <a:p>
+            <a:pPr marL="0" indent="0">
+              <a:buNone/>
+            </a:pPr>
+            <a:endParaRPr lang="en-US" sz="1800" dirty="0"/>
+          </a:p>
+          <a:p>
+            <a:pPr marL="0" indent="0">
+              <a:buNone/>
+            </a:pPr>
+            <a:r>
+              <a:rPr lang="en-US" sz="1800" dirty="0">
+                <a:solidFill>
+                  <a:srgbClr val="191919"/>
+                </a:solidFill>
+                <a:latin typeface="Times New Roman" pitchFamily="34" charset="0"/>
+                <a:ea typeface="Times New Roman" pitchFamily="34" charset="-122"/>
+                <a:cs typeface="Times New Roman" pitchFamily="34" charset="-120"/>
+              </a:rPr>
+              <a:t>Poor robustness can silently reintroduce bias or unfairness that earlier testing failed to catch.</a:t>
+            </a:r>
+            <a:endParaRPr lang="en-US" sz="1800" dirty="0"/>
+          </a:p>
+          <a:p>
+            <a:pPr marL="0" indent="0">
+              <a:buNone/>
+            </a:pPr>
+            <a:endParaRPr lang="en-US" sz="1800" dirty="0"/>
+          </a:p>
+          <a:p>
+            <a:pPr marL="0" indent="0">
+              <a:buNone/>
+            </a:pPr>
+            <a:r>
+              <a:rPr lang="en-US" sz="1800" dirty="0">
+                <a:solidFill>
+                  <a:srgbClr val="191919"/>
+                </a:solidFill>
+                <a:latin typeface="Times New Roman" pitchFamily="34" charset="0"/>
+                <a:ea typeface="Times New Roman" pitchFamily="34" charset="-122"/>
+                <a:cs typeface="Times New Roman" pitchFamily="34" charset="-120"/>
+              </a:rPr>
+              <a:t>Works together with the other four principles rather than standing alone.</a:t>
+            </a:r>
+            <a:endParaRPr lang="en-US" sz="1800" dirty="0"/>
+          </a:p>
+        </p:txBody>
+      </p:sp>
+      <p:sp>
+        <p:nvSpPr>
+          <p:cNvPr id="8" name="Text 6"/>
+          <p:cNvSpPr/>
+          <p:nvPr/>
+        </p:nvSpPr>
+        <p:spPr>
+          <a:xfrm>
+            <a:off x="502920" y="6382512"/>
+            <a:ext cx="10744200" cy="320040"/>
+          </a:xfrm>
+          <a:prstGeom prst="rect">
+            <a:avLst/>
+          </a:prstGeom>
+          <a:noFill/>
+          <a:ln/>
+        </p:spPr>
+        <p:txBody>
+          <a:bodyPr wrap="square" lIns="0" tIns="0" rIns="0" bIns="0" rtlCol="0" anchor="ctr"/>
+          <a:lstStyle/>
+          <a:p>
+            <a:pPr marL="0" indent="0">
+              <a:buNone/>
+            </a:pPr>
+            <a:r>
+              <a:rPr lang="en-US" sz="1200" i="1" dirty="0">
+                <a:solidFill>
+                  <a:srgbClr val="595959"/>
+                </a:solidFill>
+                <a:latin typeface="Times New Roman" pitchFamily="34" charset="0"/>
+                <a:ea typeface="Times New Roman" pitchFamily="34" charset="-122"/>
+                <a:cs typeface="Times New Roman" pitchFamily="34" charset="-120"/>
+              </a:rPr>
+              <a:t>Teaching cue: This closes the five-principle overview - pause here for questions before the lifecycle section.</a:t>
+            </a:r>
+            <a:endParaRPr lang="en-US" sz="1200" dirty="0"/>
+          </a:p>
+        </p:txBody>
+      </p:sp>
+      <p:sp>
+        <p:nvSpPr>
+          <p:cNvPr id="9" name="Text 7"/>
+          <p:cNvSpPr/>
+          <p:nvPr/>
+        </p:nvSpPr>
+        <p:spPr>
+          <a:xfrm>
+            <a:off x="11430000" y="6446520"/>
+            <a:ext cx="365760" cy="182880"/>
+          </a:xfrm>
+          <a:prstGeom prst="rect">
+            <a:avLst/>
+          </a:prstGeom>
+          <a:noFill/>
+          <a:ln/>
+        </p:spPr>
+        <p:txBody>
+          <a:bodyPr wrap="square" lIns="0" tIns="0" rIns="0" bIns="0" rtlCol="0" anchor="ctr"/>
+          <a:lstStyle/>
+          <a:p>
+            <a:pPr marL="0" indent="0" algn="ctr">
+              <a:buNone/>
+            </a:pPr>
+            <a:r>
+              <a:rPr lang="en-US" sz="1200" dirty="0">
+                <a:solidFill>
+                  <a:srgbClr val="595959"/>
+                </a:solidFill>
+                <a:latin typeface="Times New Roman" pitchFamily="34" charset="0"/>
+                <a:ea typeface="Times New Roman" pitchFamily="34" charset="-122"/>
+                <a:cs typeface="Times New Roman" pitchFamily="34" charset="-120"/>
+              </a:rPr>
+              <a:t>11</a:t>
             </a:r>
             <a:endParaRPr lang="en-US" sz="1200" dirty="0"/>
           </a:p>

--- a/assets/TCS349/Unit-2/Lecture1_Responsible_AI_Principles.pptx
+++ b/assets/TCS349/Unit-2/Lecture1_Responsible_AI_Principles.pptx
@@ -2054,6 +2054,17 @@
               <a:buNone/>
             </a:pPr>
             <a:r>
+              <a:rPr lang="en-US" dirty="0">
+                <a:solidFill>
+                  <a:srgbClr val="191919"/>
+                </a:solidFill>
+                <a:latin typeface="Times New Roman" pitchFamily="34" charset="0"/>
+                <a:ea typeface="Times New Roman" pitchFamily="34" charset="-122"/>
+                <a:cs typeface="Times New Roman" pitchFamily="34" charset="-120"/>
+              </a:rPr>
+              <a:t>M</a:t>
+            </a:r>
+            <a:r>
               <a:rPr lang="en-US" sz="1800" dirty="0">
                 <a:solidFill>
                   <a:srgbClr val="191919"/>
@@ -2062,7 +2073,7 @@
                 <a:ea typeface="Times New Roman" pitchFamily="34" charset="-122"/>
                 <a:cs typeface="Times New Roman" pitchFamily="34" charset="-120"/>
               </a:rPr>
-              <a:t>Dr. Manoj Kaushik</a:t>
+              <a:t>r. Manoj Kaushik</a:t>
             </a:r>
             <a:endParaRPr lang="en-US" sz="1800" dirty="0"/>
           </a:p>
@@ -2487,45 +2498,6 @@
               <a:t>AI Lifecycle</a:t>
             </a:r>
             <a:endParaRPr lang="en-US" sz="1300" dirty="0"/>
-          </a:p>
-        </p:txBody>
-      </p:sp>
-      <p:sp>
-        <p:nvSpPr>
-          <p:cNvPr id="21" name="Text 15"/>
-          <p:cNvSpPr/>
-          <p:nvPr/>
-        </p:nvSpPr>
-        <p:spPr>
-          <a:xfrm>
-            <a:off x="502920" y="6382512"/>
-            <a:ext cx="10744200" cy="320040"/>
-          </a:xfrm>
-          <a:prstGeom prst="rect">
-            <a:avLst/>
-          </a:prstGeom>
-          <a:noFill/>
-          <a:ln/>
-        </p:spPr>
-        <p:txBody>
-          <a:bodyPr wrap="square" lIns="0" tIns="0" rIns="0" bIns="0" rtlCol="0" anchor="ctr"/>
-          <a:lstStyle/>
-          <a:p>
-            <a:pPr marL="0" indent="0">
-              <a:buNone/>
-            </a:pPr>
-            <a:r>
-              <a:rPr lang="en-US" sz="1200" i="1" dirty="0">
-                <a:solidFill>
-                  <a:srgbClr val="595959"/>
-                </a:solidFill>
-                <a:latin typeface="Times New Roman" pitchFamily="34" charset="0"/>
-                <a:ea typeface="Times New Roman" pitchFamily="34" charset="-122"/>
-                <a:cs typeface="Times New Roman" pitchFamily="34" charset="-120"/>
-              </a:rPr>
-              <a:t>Teaching cue: This lecture opens Unit II - it is the framework the rest of the unit builds on.</a:t>
-            </a:r>
-            <a:endParaRPr lang="en-US" sz="1200" dirty="0"/>
           </a:p>
         </p:txBody>
       </p:sp>
@@ -2892,45 +2864,6 @@
       </p:sp>
       <p:sp>
         <p:nvSpPr>
-          <p:cNvPr id="8" name="Text 6"/>
-          <p:cNvSpPr/>
-          <p:nvPr/>
-        </p:nvSpPr>
-        <p:spPr>
-          <a:xfrm>
-            <a:off x="502920" y="6382512"/>
-            <a:ext cx="10744200" cy="320040"/>
-          </a:xfrm>
-          <a:prstGeom prst="rect">
-            <a:avLst/>
-          </a:prstGeom>
-          <a:noFill/>
-          <a:ln/>
-        </p:spPr>
-        <p:txBody>
-          <a:bodyPr wrap="square" lIns="0" tIns="0" rIns="0" bIns="0" rtlCol="0" anchor="ctr"/>
-          <a:lstStyle/>
-          <a:p>
-            <a:pPr marL="0" indent="0">
-              <a:buNone/>
-            </a:pPr>
-            <a:r>
-              <a:rPr lang="en-US" sz="1200" i="1" dirty="0">
-                <a:solidFill>
-                  <a:srgbClr val="595959"/>
-                </a:solidFill>
-                <a:latin typeface="Times New Roman" pitchFamily="34" charset="0"/>
-                <a:ea typeface="Times New Roman" pitchFamily="34" charset="-122"/>
-                <a:cs typeface="Times New Roman" pitchFamily="34" charset="-120"/>
-              </a:rPr>
-              <a:t>Teaching cue: Draw a simple left-to-right timeline on the board before the next three slides.</a:t>
-            </a:r>
-            <a:endParaRPr lang="en-US" sz="1200" dirty="0"/>
-          </a:p>
-        </p:txBody>
-      </p:sp>
-      <p:sp>
-        <p:nvSpPr>
           <p:cNvPr id="9" name="Text 7"/>
           <p:cNvSpPr/>
           <p:nvPr/>
@@ -3292,45 +3225,6 @@
       </p:sp>
       <p:sp>
         <p:nvSpPr>
-          <p:cNvPr id="8" name="Text 6"/>
-          <p:cNvSpPr/>
-          <p:nvPr/>
-        </p:nvSpPr>
-        <p:spPr>
-          <a:xfrm>
-            <a:off x="502920" y="6382512"/>
-            <a:ext cx="10744200" cy="320040"/>
-          </a:xfrm>
-          <a:prstGeom prst="rect">
-            <a:avLst/>
-          </a:prstGeom>
-          <a:noFill/>
-          <a:ln/>
-        </p:spPr>
-        <p:txBody>
-          <a:bodyPr wrap="square" lIns="0" tIns="0" rIns="0" bIns="0" rtlCol="0" anchor="ctr"/>
-          <a:lstStyle/>
-          <a:p>
-            <a:pPr marL="0" indent="0">
-              <a:buNone/>
-            </a:pPr>
-            <a:r>
-              <a:rPr lang="en-US" sz="1200" i="1" dirty="0">
-                <a:solidFill>
-                  <a:srgbClr val="595959"/>
-                </a:solidFill>
-                <a:latin typeface="Times New Roman" pitchFamily="34" charset="0"/>
-                <a:ea typeface="Times New Roman" pitchFamily="34" charset="-122"/>
-                <a:cs typeface="Times New Roman" pitchFamily="34" charset="-120"/>
-              </a:rPr>
-              <a:t>Teaching cue: Link this back to Unit I's discussion of data bias as a source of downstream harm.</a:t>
-            </a:r>
-            <a:endParaRPr lang="en-US" sz="1200" dirty="0"/>
-          </a:p>
-        </p:txBody>
-      </p:sp>
-      <p:sp>
-        <p:nvSpPr>
           <p:cNvPr id="9" name="Text 7"/>
           <p:cNvSpPr/>
           <p:nvPr/>
@@ -3692,45 +3586,6 @@
       </p:sp>
       <p:sp>
         <p:nvSpPr>
-          <p:cNvPr id="8" name="Text 6"/>
-          <p:cNvSpPr/>
-          <p:nvPr/>
-        </p:nvSpPr>
-        <p:spPr>
-          <a:xfrm>
-            <a:off x="502920" y="6382512"/>
-            <a:ext cx="10744200" cy="320040"/>
-          </a:xfrm>
-          <a:prstGeom prst="rect">
-            <a:avLst/>
-          </a:prstGeom>
-          <a:noFill/>
-          <a:ln/>
-        </p:spPr>
-        <p:txBody>
-          <a:bodyPr wrap="square" lIns="0" tIns="0" rIns="0" bIns="0" rtlCol="0" anchor="ctr"/>
-          <a:lstStyle/>
-          <a:p>
-            <a:pPr marL="0" indent="0">
-              <a:buNone/>
-            </a:pPr>
-            <a:r>
-              <a:rPr lang="en-US" sz="1200" i="1" dirty="0">
-                <a:solidFill>
-                  <a:srgbClr val="595959"/>
-                </a:solidFill>
-                <a:latin typeface="Times New Roman" pitchFamily="34" charset="0"/>
-                <a:ea typeface="Times New Roman" pitchFamily="34" charset="-122"/>
-                <a:cs typeface="Times New Roman" pitchFamily="34" charset="-120"/>
-              </a:rPr>
-              <a:t>Teaching cue: This is where Lectures 6-8's techniques become a formal part of the development process.</a:t>
-            </a:r>
-            <a:endParaRPr lang="en-US" sz="1200" dirty="0"/>
-          </a:p>
-        </p:txBody>
-      </p:sp>
-      <p:sp>
-        <p:nvSpPr>
           <p:cNvPr id="9" name="Text 7"/>
           <p:cNvSpPr/>
           <p:nvPr/>
@@ -4092,45 +3947,6 @@
       </p:sp>
       <p:sp>
         <p:nvSpPr>
-          <p:cNvPr id="8" name="Text 6"/>
-          <p:cNvSpPr/>
-          <p:nvPr/>
-        </p:nvSpPr>
-        <p:spPr>
-          <a:xfrm>
-            <a:off x="502920" y="6382512"/>
-            <a:ext cx="10744200" cy="320040"/>
-          </a:xfrm>
-          <a:prstGeom prst="rect">
-            <a:avLst/>
-          </a:prstGeom>
-          <a:noFill/>
-          <a:ln/>
-        </p:spPr>
-        <p:txBody>
-          <a:bodyPr wrap="square" lIns="0" tIns="0" rIns="0" bIns="0" rtlCol="0" anchor="ctr"/>
-          <a:lstStyle/>
-          <a:p>
-            <a:pPr marL="0" indent="0">
-              <a:buNone/>
-            </a:pPr>
-            <a:r>
-              <a:rPr lang="en-US" sz="1200" i="1" dirty="0">
-                <a:solidFill>
-                  <a:srgbClr val="595959"/>
-                </a:solidFill>
-                <a:latin typeface="Times New Roman" pitchFamily="34" charset="0"/>
-                <a:ea typeface="Times New Roman" pitchFamily="34" charset="-122"/>
-                <a:cs typeface="Times New Roman" pitchFamily="34" charset="-120"/>
-              </a:rPr>
-              <a:t>Teaching cue: Remind students that responsibility does not end at deployment - it continues for the system's whole life.</a:t>
-            </a:r>
-            <a:endParaRPr lang="en-US" sz="1200" dirty="0"/>
-          </a:p>
-        </p:txBody>
-      </p:sp>
-      <p:sp>
-        <p:nvSpPr>
           <p:cNvPr id="9" name="Text 7"/>
           <p:cNvSpPr/>
           <p:nvPr/>
@@ -4492,45 +4308,6 @@
       </p:sp>
       <p:sp>
         <p:nvSpPr>
-          <p:cNvPr id="8" name="Text 6"/>
-          <p:cNvSpPr/>
-          <p:nvPr/>
-        </p:nvSpPr>
-        <p:spPr>
-          <a:xfrm>
-            <a:off x="502920" y="6382512"/>
-            <a:ext cx="10744200" cy="320040"/>
-          </a:xfrm>
-          <a:prstGeom prst="rect">
-            <a:avLst/>
-          </a:prstGeom>
-          <a:noFill/>
-          <a:ln/>
-        </p:spPr>
-        <p:txBody>
-          <a:bodyPr wrap="square" lIns="0" tIns="0" rIns="0" bIns="0" rtlCol="0" anchor="ctr"/>
-          <a:lstStyle/>
-          <a:p>
-            <a:pPr marL="0" indent="0">
-              <a:buNone/>
-            </a:pPr>
-            <a:r>
-              <a:rPr lang="en-US" sz="1200" i="1" dirty="0">
-                <a:solidFill>
-                  <a:srgbClr val="595959"/>
-                </a:solidFill>
-                <a:latin typeface="Times New Roman" pitchFamily="34" charset="0"/>
-                <a:ea typeface="Times New Roman" pitchFamily="34" charset="-122"/>
-                <a:cs typeface="Times New Roman" pitchFamily="34" charset="-120"/>
-              </a:rPr>
-              <a:t>Teaching cue: This is a natural closing point for the conceptual portion of the lecture.</a:t>
-            </a:r>
-            <a:endParaRPr lang="en-US" sz="1200" dirty="0"/>
-          </a:p>
-        </p:txBody>
-      </p:sp>
-      <p:sp>
-        <p:nvSpPr>
           <p:cNvPr id="9" name="Text 7"/>
           <p:cNvSpPr/>
           <p:nvPr/>
@@ -4892,45 +4669,6 @@
       </p:sp>
       <p:sp>
         <p:nvSpPr>
-          <p:cNvPr id="8" name="Text 6"/>
-          <p:cNvSpPr/>
-          <p:nvPr/>
-        </p:nvSpPr>
-        <p:spPr>
-          <a:xfrm>
-            <a:off x="502920" y="6382512"/>
-            <a:ext cx="10744200" cy="320040"/>
-          </a:xfrm>
-          <a:prstGeom prst="rect">
-            <a:avLst/>
-          </a:prstGeom>
-          <a:noFill/>
-          <a:ln/>
-        </p:spPr>
-        <p:txBody>
-          <a:bodyPr wrap="square" lIns="0" tIns="0" rIns="0" bIns="0" rtlCol="0" anchor="ctr"/>
-          <a:lstStyle/>
-          <a:p>
-            <a:pPr marL="0" indent="0">
-              <a:buNone/>
-            </a:pPr>
-            <a:r>
-              <a:rPr lang="en-US" sz="1200" i="1" dirty="0">
-                <a:solidFill>
-                  <a:srgbClr val="595959"/>
-                </a:solidFill>
-                <a:latin typeface="Times New Roman" pitchFamily="34" charset="0"/>
-                <a:ea typeface="Times New Roman" pitchFamily="34" charset="-122"/>
-                <a:cs typeface="Times New Roman" pitchFamily="34" charset="-120"/>
-              </a:rPr>
-              <a:t>Teaching cue: Ask students to name one Unit I topic and place it within today's broader framework.</a:t>
-            </a:r>
-            <a:endParaRPr lang="en-US" sz="1200" dirty="0"/>
-          </a:p>
-        </p:txBody>
-      </p:sp>
-      <p:sp>
-        <p:nvSpPr>
           <p:cNvPr id="9" name="Text 7"/>
           <p:cNvSpPr/>
           <p:nvPr/>
@@ -5287,45 +5025,6 @@
               <a:t>Organisations increasingly formalise RAI through internal policies, review boards and regulatory compliance.</a:t>
             </a:r>
             <a:endParaRPr lang="en-US" sz="1800" dirty="0"/>
-          </a:p>
-        </p:txBody>
-      </p:sp>
-      <p:sp>
-        <p:nvSpPr>
-          <p:cNvPr id="8" name="Text 6"/>
-          <p:cNvSpPr/>
-          <p:nvPr/>
-        </p:nvSpPr>
-        <p:spPr>
-          <a:xfrm>
-            <a:off x="502920" y="6382512"/>
-            <a:ext cx="10744200" cy="320040"/>
-          </a:xfrm>
-          <a:prstGeom prst="rect">
-            <a:avLst/>
-          </a:prstGeom>
-          <a:noFill/>
-          <a:ln/>
-        </p:spPr>
-        <p:txBody>
-          <a:bodyPr wrap="square" lIns="0" tIns="0" rIns="0" bIns="0" rtlCol="0" anchor="ctr"/>
-          <a:lstStyle/>
-          <a:p>
-            <a:pPr marL="0" indent="0">
-              <a:buNone/>
-            </a:pPr>
-            <a:r>
-              <a:rPr lang="en-US" sz="1200" i="1" dirty="0">
-                <a:solidFill>
-                  <a:srgbClr val="595959"/>
-                </a:solidFill>
-                <a:latin typeface="Times New Roman" pitchFamily="34" charset="0"/>
-                <a:ea typeface="Times New Roman" pitchFamily="34" charset="-122"/>
-                <a:cs typeface="Times New Roman" pitchFamily="34" charset="-120"/>
-              </a:rPr>
-              <a:t>Teaching cue: Contrast a purely performance-driven mindset with a responsibility-driven mindset using a quick example.</a:t>
-            </a:r>
-            <a:endParaRPr lang="en-US" sz="1200" dirty="0"/>
           </a:p>
         </p:txBody>
       </p:sp>
@@ -6589,45 +6288,6 @@
       </p:graphicFrame>
       <p:sp>
         <p:nvSpPr>
-          <p:cNvPr id="8" name="Text 5"/>
-          <p:cNvSpPr/>
-          <p:nvPr/>
-        </p:nvSpPr>
-        <p:spPr>
-          <a:xfrm>
-            <a:off x="502920" y="6382512"/>
-            <a:ext cx="10744200" cy="320040"/>
-          </a:xfrm>
-          <a:prstGeom prst="rect">
-            <a:avLst/>
-          </a:prstGeom>
-          <a:noFill/>
-          <a:ln/>
-        </p:spPr>
-        <p:txBody>
-          <a:bodyPr wrap="square" lIns="0" tIns="0" rIns="0" bIns="0" rtlCol="0" anchor="ctr"/>
-          <a:lstStyle/>
-          <a:p>
-            <a:pPr marL="0" indent="0">
-              <a:buNone/>
-            </a:pPr>
-            <a:r>
-              <a:rPr lang="en-US" sz="1200" i="1" dirty="0">
-                <a:solidFill>
-                  <a:srgbClr val="595959"/>
-                </a:solidFill>
-                <a:latin typeface="Times New Roman" pitchFamily="34" charset="0"/>
-                <a:ea typeface="Times New Roman" pitchFamily="34" charset="-122"/>
-                <a:cs typeface="Times New Roman" pitchFamily="34" charset="-120"/>
-              </a:rPr>
-              <a:t>Teaching cue: The next five slides take one row of this table at a time.</a:t>
-            </a:r>
-            <a:endParaRPr lang="en-US" sz="1200" dirty="0"/>
-          </a:p>
-        </p:txBody>
-      </p:sp>
-      <p:sp>
-        <p:nvSpPr>
           <p:cNvPr id="9" name="Text 6"/>
           <p:cNvSpPr/>
           <p:nvPr/>
@@ -6989,45 +6649,6 @@
       </p:sp>
       <p:sp>
         <p:nvSpPr>
-          <p:cNvPr id="8" name="Text 6"/>
-          <p:cNvSpPr/>
-          <p:nvPr/>
-        </p:nvSpPr>
-        <p:spPr>
-          <a:xfrm>
-            <a:off x="502920" y="6382512"/>
-            <a:ext cx="10744200" cy="320040"/>
-          </a:xfrm>
-          <a:prstGeom prst="rect">
-            <a:avLst/>
-          </a:prstGeom>
-          <a:noFill/>
-          <a:ln/>
-        </p:spPr>
-        <p:txBody>
-          <a:bodyPr wrap="square" lIns="0" tIns="0" rIns="0" bIns="0" rtlCol="0" anchor="ctr"/>
-          <a:lstStyle/>
-          <a:p>
-            <a:pPr marL="0" indent="0">
-              <a:buNone/>
-            </a:pPr>
-            <a:r>
-              <a:rPr lang="en-US" sz="1200" i="1" dirty="0">
-                <a:solidFill>
-                  <a:srgbClr val="595959"/>
-                </a:solidFill>
-                <a:latin typeface="Times New Roman" pitchFamily="34" charset="0"/>
-                <a:ea typeface="Times New Roman" pitchFamily="34" charset="-122"/>
-                <a:cs typeface="Times New Roman" pitchFamily="34" charset="-120"/>
-              </a:rPr>
-              <a:t>Teaching cue: This is a direct callback to Lectures 6-8 - keep this recap brief.</a:t>
-            </a:r>
-            <a:endParaRPr lang="en-US" sz="1200" dirty="0"/>
-          </a:p>
-        </p:txBody>
-      </p:sp>
-      <p:sp>
-        <p:nvSpPr>
           <p:cNvPr id="9" name="Text 7"/>
           <p:cNvSpPr/>
           <p:nvPr/>
@@ -7389,45 +7010,6 @@
       </p:sp>
       <p:sp>
         <p:nvSpPr>
-          <p:cNvPr id="8" name="Text 6"/>
-          <p:cNvSpPr/>
-          <p:nvPr/>
-        </p:nvSpPr>
-        <p:spPr>
-          <a:xfrm>
-            <a:off x="502920" y="6382512"/>
-            <a:ext cx="10744200" cy="320040"/>
-          </a:xfrm>
-          <a:prstGeom prst="rect">
-            <a:avLst/>
-          </a:prstGeom>
-          <a:noFill/>
-          <a:ln/>
-        </p:spPr>
-        <p:txBody>
-          <a:bodyPr wrap="square" lIns="0" tIns="0" rIns="0" bIns="0" rtlCol="0" anchor="ctr"/>
-          <a:lstStyle/>
-          <a:p>
-            <a:pPr marL="0" indent="0">
-              <a:buNone/>
-            </a:pPr>
-            <a:r>
-              <a:rPr lang="en-US" sz="1200" i="1" dirty="0">
-                <a:solidFill>
-                  <a:srgbClr val="595959"/>
-                </a:solidFill>
-                <a:latin typeface="Times New Roman" pitchFamily="34" charset="0"/>
-                <a:ea typeface="Times New Roman" pitchFamily="34" charset="-122"/>
-                <a:cs typeface="Times New Roman" pitchFamily="34" charset="-120"/>
-              </a:rPr>
-              <a:t>Teaching cue: Preview Lecture 11 briefly here so students see the connection.</a:t>
-            </a:r>
-            <a:endParaRPr lang="en-US" sz="1200" dirty="0"/>
-          </a:p>
-        </p:txBody>
-      </p:sp>
-      <p:sp>
-        <p:nvSpPr>
           <p:cNvPr id="9" name="Text 7"/>
           <p:cNvSpPr/>
           <p:nvPr/>
@@ -7789,45 +7371,6 @@
       </p:sp>
       <p:sp>
         <p:nvSpPr>
-          <p:cNvPr id="8" name="Text 6"/>
-          <p:cNvSpPr/>
-          <p:nvPr/>
-        </p:nvSpPr>
-        <p:spPr>
-          <a:xfrm>
-            <a:off x="502920" y="6382512"/>
-            <a:ext cx="10744200" cy="320040"/>
-          </a:xfrm>
-          <a:prstGeom prst="rect">
-            <a:avLst/>
-          </a:prstGeom>
-          <a:noFill/>
-          <a:ln/>
-        </p:spPr>
-        <p:txBody>
-          <a:bodyPr wrap="square" lIns="0" tIns="0" rIns="0" bIns="0" rtlCol="0" anchor="ctr"/>
-          <a:lstStyle/>
-          <a:p>
-            <a:pPr marL="0" indent="0">
-              <a:buNone/>
-            </a:pPr>
-            <a:r>
-              <a:rPr lang="en-US" sz="1200" i="1" dirty="0">
-                <a:solidFill>
-                  <a:srgbClr val="595959"/>
-                </a:solidFill>
-                <a:latin typeface="Times New Roman" pitchFamily="34" charset="0"/>
-                <a:ea typeface="Times New Roman" pitchFamily="34" charset="-122"/>
-                <a:cs typeface="Times New Roman" pitchFamily="34" charset="-120"/>
-              </a:rPr>
-              <a:t>Teaching cue: Ask students who should be accountable if a self-driving car misclassifies an obstacle.</a:t>
-            </a:r>
-            <a:endParaRPr lang="en-US" sz="1200" dirty="0"/>
-          </a:p>
-        </p:txBody>
-      </p:sp>
-      <p:sp>
-        <p:nvSpPr>
           <p:cNvPr id="9" name="Text 7"/>
           <p:cNvSpPr/>
           <p:nvPr/>
@@ -8189,45 +7732,6 @@
       </p:sp>
       <p:sp>
         <p:nvSpPr>
-          <p:cNvPr id="8" name="Text 6"/>
-          <p:cNvSpPr/>
-          <p:nvPr/>
-        </p:nvSpPr>
-        <p:spPr>
-          <a:xfrm>
-            <a:off x="502920" y="6382512"/>
-            <a:ext cx="10744200" cy="320040"/>
-          </a:xfrm>
-          <a:prstGeom prst="rect">
-            <a:avLst/>
-          </a:prstGeom>
-          <a:noFill/>
-          <a:ln/>
-        </p:spPr>
-        <p:txBody>
-          <a:bodyPr wrap="square" lIns="0" tIns="0" rIns="0" bIns="0" rtlCol="0" anchor="ctr"/>
-          <a:lstStyle/>
-          <a:p>
-            <a:pPr marL="0" indent="0">
-              <a:buNone/>
-            </a:pPr>
-            <a:r>
-              <a:rPr lang="en-US" sz="1200" i="1" dirty="0">
-                <a:solidFill>
-                  <a:srgbClr val="595959"/>
-                </a:solidFill>
-                <a:latin typeface="Times New Roman" pitchFamily="34" charset="0"/>
-                <a:ea typeface="Times New Roman" pitchFamily="34" charset="-122"/>
-                <a:cs typeface="Times New Roman" pitchFamily="34" charset="-120"/>
-              </a:rPr>
-              <a:t>Teaching cue: A short preview is enough here - the full treatment comes in Week 6.</a:t>
-            </a:r>
-            <a:endParaRPr lang="en-US" sz="1200" dirty="0"/>
-          </a:p>
-        </p:txBody>
-      </p:sp>
-      <p:sp>
-        <p:nvSpPr>
           <p:cNvPr id="9" name="Text 7"/>
           <p:cNvSpPr/>
           <p:nvPr/>
@@ -8584,45 +8088,6 @@
               <a:t>Works together with the other four principles rather than standing alone.</a:t>
             </a:r>
             <a:endParaRPr lang="en-US" sz="1800" dirty="0"/>
-          </a:p>
-        </p:txBody>
-      </p:sp>
-      <p:sp>
-        <p:nvSpPr>
-          <p:cNvPr id="8" name="Text 6"/>
-          <p:cNvSpPr/>
-          <p:nvPr/>
-        </p:nvSpPr>
-        <p:spPr>
-          <a:xfrm>
-            <a:off x="502920" y="6382512"/>
-            <a:ext cx="10744200" cy="320040"/>
-          </a:xfrm>
-          <a:prstGeom prst="rect">
-            <a:avLst/>
-          </a:prstGeom>
-          <a:noFill/>
-          <a:ln/>
-        </p:spPr>
-        <p:txBody>
-          <a:bodyPr wrap="square" lIns="0" tIns="0" rIns="0" bIns="0" rtlCol="0" anchor="ctr"/>
-          <a:lstStyle/>
-          <a:p>
-            <a:pPr marL="0" indent="0">
-              <a:buNone/>
-            </a:pPr>
-            <a:r>
-              <a:rPr lang="en-US" sz="1200" i="1" dirty="0">
-                <a:solidFill>
-                  <a:srgbClr val="595959"/>
-                </a:solidFill>
-                <a:latin typeface="Times New Roman" pitchFamily="34" charset="0"/>
-                <a:ea typeface="Times New Roman" pitchFamily="34" charset="-122"/>
-                <a:cs typeface="Times New Roman" pitchFamily="34" charset="-120"/>
-              </a:rPr>
-              <a:t>Teaching cue: This closes the five-principle overview - pause here for questions before the lifecycle section.</a:t>
-            </a:r>
-            <a:endParaRPr lang="en-US" sz="1200" dirty="0"/>
           </a:p>
         </p:txBody>
       </p:sp>
